--- a/docs/Project_Presentation.pptx
+++ b/docs/Project_Presentation.pptx
@@ -4,6 +4,9 @@
   <p:sldMasterIdLst>
     <p:sldMasterId id="2147483648" r:id="rId1"/>
   </p:sldMasterIdLst>
+  <p:notesMasterIdLst>
+    <p:notesMasterId r:id="rId16"/>
+  </p:notesMasterIdLst>
   <p:sldIdLst>
     <p:sldId id="256" r:id="rId2"/>
     <p:sldId id="257" r:id="rId3"/>
@@ -20,9 +23,6 @@
     <p:sldId id="268" r:id="rId14"/>
     <p:sldId id="269" r:id="rId15"/>
   </p:sldIdLst>
-  <p:notesMasterIdLst>
-    <p:notesMasterId r:id="rId16"/>
-  </p:notesMasterIdLst>
   <p:sldSz cx="12192000" cy="6858000"/>
   <p:notesSz cx="6858000" cy="12192000"/>
   <p:defaultTextStyle>
@@ -117,6 +117,11 @@
       </a:defRPr>
     </a:lvl9pPr>
   </p:defaultTextStyle>
+  <p:extLst>
+    <p:ext uri="{EFAFB233-063F-42B5-8137-9DF3F51BA10A}">
+      <p15:sldGuideLst xmlns:p15="http://schemas.microsoft.com/office/powerpoint/2012/main"/>
+    </p:ext>
+  </p:extLst>
 </p:presentation>
 </file>
 
@@ -142,234 +147,10 @@
           <a:chExt cx="0" cy="0"/>
         </a:xfrm>
       </p:grpSpPr>
-      <p:sp>
-        <p:nvSpPr>
-          <p:cNvPr id="2" name="Header Placeholder 1"/>
-          <p:cNvSpPr>
-            <a:spLocks noGrp="1"/>
-          </p:cNvSpPr>
-          <p:nvPr>
-            <p:ph type="hdr" sz="quarter"/>
-          </p:nvPr>
-        </p:nvSpPr>
-        <p:spPr>
-          <a:xfrm>
-            <a:off x="0" y="0"/>
-            <a:ext cx="2971800" cy="458788"/>
-          </a:xfrm>
-          <a:prstGeom prst="rect">
-            <a:avLst/>
-          </a:prstGeom>
-        </p:spPr>
-        <p:txBody>
-          <a:bodyPr vert="horz" lIns="91440" tIns="45720" rIns="91440" bIns="45720" rtlCol="0"/>
-          <a:lstStyle>
-            <a:lvl1pPr algn="l">
-              <a:defRPr sz="1200"/>
-            </a:lvl1pPr>
-          </a:lstStyle>
-          <a:p>
-            <a:endParaRPr lang="en-US"/>
-          </a:p>
-        </p:txBody>
-      </p:sp>
-      <p:sp>
-        <p:nvSpPr>
-          <p:cNvPr id="3" name="Date Placeholder 2"/>
-          <p:cNvSpPr>
-            <a:spLocks noGrp="1"/>
-          </p:cNvSpPr>
-          <p:nvPr>
-            <p:ph type="dt" idx="1"/>
-          </p:nvPr>
-        </p:nvSpPr>
-        <p:spPr>
-          <a:xfrm>
-            <a:off x="3884613" y="0"/>
-            <a:ext cx="2971800" cy="458788"/>
-          </a:xfrm>
-          <a:prstGeom prst="rect">
-            <a:avLst/>
-          </a:prstGeom>
-        </p:spPr>
-        <p:txBody>
-          <a:bodyPr vert="horz" lIns="91440" tIns="45720" rIns="91440" bIns="45720" rtlCol="0"/>
-          <a:lstStyle>
-            <a:lvl1pPr algn="r">
-              <a:defRPr sz="1200"/>
-            </a:lvl1pPr>
-          </a:lstStyle>
-          <a:p>
-            <a:fld id="{5282F153-3F37-0F45-9E97-73ACFA13230C}" type="datetimeFigureOut">
-              <a:rPr lang="en-US"/>
-              <a:t>7/23/19</a:t>
-            </a:fld>
-            <a:endParaRPr lang="en-US"/>
-          </a:p>
-        </p:txBody>
-      </p:sp>
-      <p:sp>
-        <p:nvSpPr>
-          <p:cNvPr id="4" name="Slide Image Placeholder 3"/>
-          <p:cNvSpPr>
-            <a:spLocks noGrp="1" noRot="1" noChangeAspect="1"/>
-          </p:cNvSpPr>
-          <p:nvPr>
-            <p:ph type="sldImg" idx="2"/>
-          </p:nvPr>
-        </p:nvSpPr>
-        <p:spPr>
-          <a:xfrm>
-            <a:off x="685800" y="1143000"/>
-            <a:ext cx="5486400" cy="3086100"/>
-          </a:xfrm>
-          <a:prstGeom prst="rect">
-            <a:avLst/>
-          </a:prstGeom>
-          <a:noFill/>
-          <a:ln w="12700">
-            <a:solidFill>
-              <a:prstClr val="black"/>
-            </a:solidFill>
-          </a:ln>
-        </p:spPr>
-        <p:txBody>
-          <a:bodyPr vert="horz" lIns="91440" tIns="45720" rIns="91440" bIns="45720" rtlCol="0" anchor="ctr"/>
-          <a:lstStyle/>
-          <a:p>
-            <a:endParaRPr lang="en-US"/>
-          </a:p>
-        </p:txBody>
-      </p:sp>
-      <p:sp>
-        <p:nvSpPr>
-          <p:cNvPr id="5" name="Notes Placeholder 4"/>
-          <p:cNvSpPr>
-            <a:spLocks noGrp="1"/>
-          </p:cNvSpPr>
-          <p:nvPr>
-            <p:ph type="body" sz="quarter" idx="3"/>
-          </p:nvPr>
-        </p:nvSpPr>
-        <p:spPr>
-          <a:xfrm>
-            <a:off x="685800" y="4400550"/>
-            <a:ext cx="5486400" cy="3600450"/>
-          </a:xfrm>
-          <a:prstGeom prst="rect">
-            <a:avLst/>
-          </a:prstGeom>
-        </p:spPr>
-        <p:txBody>
-          <a:bodyPr vert="horz" lIns="91440" tIns="45720" rIns="91440" bIns="45720" rtlCol="0"/>
-          <a:lstStyle/>
-          <a:p>
-            <a:pPr lvl="0"/>
-            <a:r>
-              <a:rPr lang="en-US"/>
-              <a:t>Click to edit Master text styles</a:t>
-            </a:r>
-          </a:p>
-          <a:p>
-            <a:pPr lvl="1"/>
-            <a:r>
-              <a:rPr lang="en-US"/>
-              <a:t>Second level</a:t>
-            </a:r>
-          </a:p>
-          <a:p>
-            <a:pPr lvl="2"/>
-            <a:r>
-              <a:rPr lang="en-US"/>
-              <a:t>Third level</a:t>
-            </a:r>
-          </a:p>
-          <a:p>
-            <a:pPr lvl="3"/>
-            <a:r>
-              <a:rPr lang="en-US"/>
-              <a:t>Fourth level</a:t>
-            </a:r>
-          </a:p>
-          <a:p>
-            <a:pPr lvl="4"/>
-            <a:r>
-              <a:rPr lang="en-US"/>
-              <a:t>Fifth level</a:t>
-            </a:r>
-          </a:p>
-        </p:txBody>
-      </p:sp>
-      <p:sp>
-        <p:nvSpPr>
-          <p:cNvPr id="6" name="Footer Placeholder 5"/>
-          <p:cNvSpPr>
-            <a:spLocks noGrp="1"/>
-          </p:cNvSpPr>
-          <p:nvPr>
-            <p:ph type="ftr" sz="quarter" idx="4"/>
-          </p:nvPr>
-        </p:nvSpPr>
-        <p:spPr>
-          <a:xfrm>
-            <a:off x="0" y="8685213"/>
-            <a:ext cx="2971800" cy="458787"/>
-          </a:xfrm>
-          <a:prstGeom prst="rect">
-            <a:avLst/>
-          </a:prstGeom>
-        </p:spPr>
-        <p:txBody>
-          <a:bodyPr vert="horz" lIns="91440" tIns="45720" rIns="91440" bIns="45720" rtlCol="0" anchor="b"/>
-          <a:lstStyle>
-            <a:lvl1pPr algn="l">
-              <a:defRPr sz="1200"/>
-            </a:lvl1pPr>
-          </a:lstStyle>
-          <a:p>
-            <a:endParaRPr lang="en-US"/>
-          </a:p>
-        </p:txBody>
-      </p:sp>
-      <p:sp>
-        <p:nvSpPr>
-          <p:cNvPr id="7" name="Slide Number Placeholder 6"/>
-          <p:cNvSpPr>
-            <a:spLocks noGrp="1"/>
-          </p:cNvSpPr>
-          <p:nvPr>
-            <p:ph type="sldNum" sz="quarter" idx="5"/>
-          </p:nvPr>
-        </p:nvSpPr>
-        <p:spPr>
-          <a:xfrm>
-            <a:off x="3884613" y="8685213"/>
-            <a:ext cx="2971800" cy="458787"/>
-          </a:xfrm>
-          <a:prstGeom prst="rect">
-            <a:avLst/>
-          </a:prstGeom>
-        </p:spPr>
-        <p:txBody>
-          <a:bodyPr vert="horz" lIns="91440" tIns="45720" rIns="91440" bIns="45720" rtlCol="0" anchor="b"/>
-          <a:lstStyle>
-            <a:lvl1pPr algn="r">
-              <a:defRPr sz="1200"/>
-            </a:lvl1pPr>
-          </a:lstStyle>
-          <a:p>
-            <a:fld id="{CE5E9CC1-C706-0F49-92D6-E571CC5EEA8F}" type="slidenum">
-              <a:rPr lang="en-US"/>
-              <a:t>‹#›</a:t>
-            </a:fld>
-            <a:endParaRPr lang="en-US"/>
-          </a:p>
-        </p:txBody>
-      </p:sp>
     </p:spTree>
     <p:extLst>
       <p:ext uri="{BB962C8B-B14F-4D97-AF65-F5344CB8AC3E}">
-        <p14:creationId xmlns:p14="http://schemas.microsoft.com/office/powerpoint/2010/main" val="1024086991"/>
+        <p14:creationId xmlns:p14="http://schemas.microsoft.com/office/powerpoint/2010/main" val="3910060610"/>
       </p:ext>
     </p:extLst>
   </p:cSld>
@@ -517,7 +298,6 @@
               <a:rPr lang="en-US" dirty="0"/>
               <a:t>Good morning. I built an AI system that processes customer complaint documents end to end. I will show you the business problem, the architecture, the code that matters, and then run it live.</a:t>
             </a:r>
-            <a:endParaRPr lang="en-US" dirty="0"/>
           </a:p>
         </p:txBody>
       </p:sp>
@@ -605,7 +385,6 @@
               <a:rPr lang="en-US" dirty="0"/>
               <a:t>Point at the escalate column — the system worked that out from the meaning of the text. And the last row is the interesting one: it is an enquiry, not a complaint, which a keyword rule would get wrong.</a:t>
             </a:r>
-            <a:endParaRPr lang="en-US" dirty="0"/>
           </a:p>
         </p:txBody>
       </p:sp>
@@ -693,7 +472,6 @@
               <a:rPr lang="en-US" dirty="0"/>
               <a:t>The tests need no API key, which is the detail that makes continuous integration possible — GitHub can run the full suite on every push without a secret and without cost.</a:t>
             </a:r>
-            <a:endParaRPr lang="en-US" dirty="0"/>
           </a:p>
         </p:txBody>
       </p:sp>
@@ -781,7 +559,6 @@
               <a:rPr lang="en-US" dirty="0"/>
               <a:t>All twelve assessed skills, and where to find each one. The project report has this same table with more detail.</a:t>
             </a:r>
-            <a:endParaRPr lang="en-US" dirty="0"/>
           </a:p>
         </p:txBody>
       </p:sp>
@@ -869,7 +646,6 @@
               <a:rPr lang="en-US" dirty="0"/>
               <a:t>I would rather state the limits than have the panel find them. The most valuable next step is OCR, because scanned documents are common in the real world; after that, concurrency across documents, since the program is almost entirely waiting on the network.</a:t>
             </a:r>
-            <a:endParaRPr lang="en-US" dirty="0"/>
           </a:p>
         </p:txBody>
       </p:sp>
@@ -957,7 +733,6 @@
               <a:rPr lang="en-US" dirty="0"/>
               <a:t>To close: three design decisions carry most of the value — structured output, explicit orchestration, and error handling that keeps failures visible. Happy to take questions, and I can run it live on any document you would like to give me.</a:t>
             </a:r>
-            <a:endParaRPr lang="en-US" dirty="0"/>
           </a:p>
         </p:txBody>
       </p:sp>
@@ -1045,7 +820,6 @@
               <a:rPr lang="en-US" dirty="0"/>
               <a:t>The work is repetitive, slow and inconsistent between agents. And because the input is free text in three different file formats, you cannot solve it with a rule-based parser — which is exactly why an LLM is the right tool.</a:t>
             </a:r>
-            <a:endParaRPr lang="en-US" dirty="0"/>
           </a:p>
         </p:txBody>
       </p:sp>
@@ -1133,7 +907,6 @@
               <a:rPr lang="en-US" dirty="0"/>
               <a:t>Everything is produced by one command. Three artefacts per document, plus a consolidated CSV that an operations team would actually use.</a:t>
             </a:r>
-            <a:endParaRPr lang="en-US" dirty="0"/>
           </a:p>
         </p:txBody>
       </p:sp>
@@ -1221,7 +994,6 @@
               <a:rPr lang="en-US" dirty="0"/>
               <a:t>Six small modules, each with one job. app.py runs the batch. document_reader turns files into text. workflow orchestrates. ai_tasks holds the prompts and the LLM calls. models defines what the model must return. config holds every setting. Nothing depends on app.py, which is why the whole thing is testable.</a:t>
             </a:r>
-            <a:endParaRPr lang="en-US" dirty="0"/>
           </a:p>
         </p:txBody>
       </p:sp>
@@ -1309,7 +1081,6 @@
               <a:rPr lang="en-US" dirty="0"/>
               <a:t>This is the orchestration requirement. Extraction is a genuine sequential dependency. The email and the summary are not dependent on each other, so I draw two edges out of extract and LangGraph runs them together. Each document finishes noticeably faster.</a:t>
             </a:r>
-            <a:endParaRPr lang="en-US" dirty="0"/>
           </a:p>
         </p:txBody>
       </p:sp>
@@ -1397,7 +1168,6 @@
               <a:rPr lang="en-US" dirty="0"/>
               <a:t>This is the single most important idea in the project. I do not ask for text and then parse it. with_structured_output binds the Pydantic class to the model, so it has to return exactly those fields, and LangChain validates the reply before my code sees it.</a:t>
             </a:r>
-            <a:endParaRPr lang="en-US" dirty="0"/>
           </a:p>
         </p:txBody>
       </p:sp>
@@ -1485,7 +1255,6 @@
               <a:rPr lang="en-US" dirty="0"/>
               <a:t>Fabricated detail is the central risk here. Four measures work together: the shared rule, structured output, optional fields that default to None, and the fact that the two generation tasks receive the validated extraction rather than the raw document.</a:t>
             </a:r>
-            <a:endParaRPr lang="en-US" dirty="0"/>
           </a:p>
         </p:txBody>
       </p:sp>
@@ -1573,7 +1342,6 @@
               <a:rPr lang="en-US" dirty="0"/>
               <a:t>The principle throughout is that a failure must end up visible in the output rather than quietly reducing the number of rows in the report. I also check for the API key before processing anything, so a missing key costs nothing.</a:t>
             </a:r>
-            <a:endParaRPr lang="en-US" dirty="0"/>
           </a:p>
         </p:txBody>
       </p:sp>
@@ -1661,7 +1429,6 @@
               <a:rPr lang="en-US" dirty="0"/>
               <a:t>Every choice is deliberate. gpt-4o-mini because it supports structured output well and is cheap. LangGraph because the parallelism is real, not decorative. Pydantic because it is both the schema and the validation.</a:t>
             </a:r>
-            <a:endParaRPr lang="en-US" dirty="0"/>
           </a:p>
         </p:txBody>
       </p:sp>
@@ -1734,6 +1501,11 @@
 <file path=ppt/slideMasters/slideMaster1.xml><?xml version="1.0" encoding="utf-8"?>
 <p:sldMaster xmlns:a="http://schemas.openxmlformats.org/drawingml/2006/main" xmlns:r="http://schemas.openxmlformats.org/officeDocument/2006/relationships" xmlns:p="http://schemas.openxmlformats.org/presentationml/2006/main">
   <p:cSld>
+    <p:bg>
+      <p:bgRef idx="1001">
+        <a:schemeClr val="bg1"/>
+      </p:bgRef>
+    </p:bg>
     <p:spTree>
       <p:nvGrpSpPr>
         <p:cNvPr id="1" name=""/>
@@ -2016,6 +1788,7 @@
         <a:solidFill>
           <a:srgbClr val="2A1B4D"/>
         </a:solidFill>
+        <a:effectLst/>
       </p:bgPr>
     </p:bg>
     <p:spTree>
@@ -2051,6 +1824,13 @@
           </a:solidFill>
           <a:ln/>
         </p:spPr>
+        <p:txBody>
+          <a:bodyPr/>
+          <a:lstStyle/>
+          <a:p>
+            <a:endParaRPr lang="en-IN"/>
+          </a:p>
+        </p:txBody>
       </p:sp>
       <p:sp>
         <p:nvSpPr>
@@ -2071,6 +1851,13 @@
           </a:solidFill>
           <a:ln/>
         </p:spPr>
+        <p:txBody>
+          <a:bodyPr/>
+          <a:lstStyle/>
+          <a:p>
+            <a:endParaRPr lang="en-IN"/>
+          </a:p>
+        </p:txBody>
       </p:sp>
       <p:sp>
         <p:nvSpPr>
@@ -2093,11 +1880,11 @@
           <a:bodyPr wrap="square" lIns="0" tIns="0" rIns="0" bIns="0" rtlCol="0" anchor="ctr"/>
           <a:lstStyle/>
           <a:p>
-            <a:pPr indent="0" marL="0">
-              <a:buNone/>
-            </a:pPr>
-            <a:r>
-              <a:rPr lang="en-US" sz="1300" b="1" spc="300" kern="0" dirty="0">
+            <a:pPr marL="0" indent="0">
+              <a:buNone/>
+            </a:pPr>
+            <a:r>
+              <a:rPr lang="en-US" sz="1300" b="1" kern="0" spc="300" dirty="0">
                 <a:solidFill>
                   <a:srgbClr val="CFC4EE"/>
                 </a:solidFill>
@@ -2132,7 +1919,7 @@
           <a:bodyPr wrap="square" lIns="0" tIns="0" rIns="0" bIns="0" rtlCol="0" anchor="ctr"/>
           <a:lstStyle/>
           <a:p>
-            <a:pPr indent="0" marL="0">
+            <a:pPr marL="0" indent="0">
               <a:buNone/>
             </a:pPr>
             <a:r>
@@ -2171,7 +1958,7 @@
           <a:bodyPr wrap="square" lIns="0" tIns="0" rIns="0" bIns="0" rtlCol="0" anchor="ctr"/>
           <a:lstStyle/>
           <a:p>
-            <a:pPr indent="0" marL="0">
+            <a:pPr marL="0" indent="0">
               <a:buNone/>
             </a:pPr>
             <a:r>
@@ -2210,7 +1997,7 @@
           <a:bodyPr wrap="square" lIns="0" tIns="0" rIns="0" bIns="0" rtlCol="0" anchor="ctr"/>
           <a:lstStyle/>
           <a:p>
-            <a:pPr indent="0" marL="0">
+            <a:pPr marL="0" indent="0">
               <a:lnSpc>
                 <a:spcPts val="2200"/>
               </a:lnSpc>
@@ -2252,7 +2039,7 @@
           <a:bodyPr wrap="square" lIns="0" tIns="0" rIns="0" bIns="0" rtlCol="0" anchor="ctr"/>
           <a:lstStyle/>
           <a:p>
-            <a:pPr indent="0" marL="0">
+            <a:pPr marL="0" indent="0">
               <a:buNone/>
             </a:pPr>
             <a:r>
@@ -2291,7 +2078,7 @@
           <a:bodyPr wrap="square" lIns="0" tIns="0" rIns="0" bIns="0" rtlCol="0" anchor="ctr"/>
           <a:lstStyle/>
           <a:p>
-            <a:pPr indent="0" marL="0">
+            <a:pPr marL="0" indent="0">
               <a:buNone/>
             </a:pPr>
             <a:r>
@@ -2308,7 +2095,7 @@
             <a:endParaRPr lang="en-US" sz="1500" dirty="0"/>
           </a:p>
           <a:p>
-            <a:pPr indent="0" marL="0">
+            <a:pPr marL="0" indent="0">
               <a:buNone/>
             </a:pPr>
             <a:r>
@@ -2342,6 +2129,7 @@
         <a:solidFill>
           <a:srgbClr val="FFFFFF"/>
         </a:solidFill>
+        <a:effectLst/>
       </p:bgPr>
     </p:bg>
     <p:spTree>
@@ -2379,11 +2167,11 @@
           <a:bodyPr wrap="square" lIns="0" tIns="0" rIns="0" bIns="0" rtlCol="0" anchor="ctr"/>
           <a:lstStyle/>
           <a:p>
-            <a:pPr indent="0" marL="0">
-              <a:buNone/>
-            </a:pPr>
-            <a:r>
-              <a:rPr lang="en-US" sz="1100" b="1" spc="200" kern="0" dirty="0">
+            <a:pPr marL="0" indent="0">
+              <a:buNone/>
+            </a:pPr>
+            <a:r>
+              <a:rPr lang="en-US" sz="1100" b="1" kern="0" spc="200" dirty="0">
                 <a:solidFill>
                   <a:srgbClr val="6B46C1"/>
                 </a:solidFill>
@@ -2418,7 +2206,7 @@
           <a:bodyPr wrap="square" lIns="0" tIns="0" rIns="0" bIns="0" rtlCol="0" anchor="ctr"/>
           <a:lstStyle/>
           <a:p>
-            <a:pPr indent="0" marL="0">
+            <a:pPr marL="0" indent="0">
               <a:buNone/>
             </a:pPr>
             <a:r>
@@ -2462,13 +2250,20 @@
             <a:prstDash val="solid"/>
           </a:ln>
           <a:effectLst>
-            <a:outerShdw sx="100000" sy="100000" kx="0" ky="0" algn="bl" rotWithShape="0" blurRad="101600" dist="25400" dir="5400000">
+            <a:outerShdw blurRad="101600" dist="25400" dir="5400000" algn="bl" rotWithShape="0">
               <a:srgbClr val="B9B2CE">
                 <a:alpha val="35000"/>
               </a:srgbClr>
             </a:outerShdw>
           </a:effectLst>
         </p:spPr>
+        <p:txBody>
+          <a:bodyPr/>
+          <a:lstStyle/>
+          <a:p>
+            <a:endParaRPr lang="en-IN"/>
+          </a:p>
+        </p:txBody>
       </p:sp>
       <p:sp>
         <p:nvSpPr>
@@ -2491,7 +2286,7 @@
           <a:bodyPr wrap="square" lIns="0" tIns="0" rIns="0" bIns="0" rtlCol="0" anchor="ctr"/>
           <a:lstStyle/>
           <a:p>
-            <a:pPr algn="ctr" indent="0" marL="0">
+            <a:pPr marL="0" indent="0" algn="ctr">
               <a:buNone/>
             </a:pPr>
             <a:r>
@@ -2530,7 +2325,7 @@
           <a:bodyPr wrap="square" lIns="0" tIns="0" rIns="0" bIns="0" rtlCol="0" anchor="ctr"/>
           <a:lstStyle/>
           <a:p>
-            <a:pPr algn="ctr" indent="0" marL="0">
+            <a:pPr marL="0" indent="0" algn="ctr">
               <a:lnSpc>
                 <a:spcPts val="1500"/>
               </a:lnSpc>
@@ -2550,7 +2345,7 @@
             <a:endParaRPr lang="en-US" sz="1200" dirty="0"/>
           </a:p>
           <a:p>
-            <a:pPr algn="ctr" indent="0" marL="0">
+            <a:pPr marL="0" indent="0" algn="ctr">
               <a:lnSpc>
                 <a:spcPts val="1500"/>
               </a:lnSpc>
@@ -2597,13 +2392,20 @@
             <a:prstDash val="solid"/>
           </a:ln>
           <a:effectLst>
-            <a:outerShdw sx="100000" sy="100000" kx="0" ky="0" algn="bl" rotWithShape="0" blurRad="101600" dist="25400" dir="5400000">
+            <a:outerShdw blurRad="101600" dist="25400" dir="5400000" algn="bl" rotWithShape="0">
               <a:srgbClr val="B9B2CE">
                 <a:alpha val="35000"/>
               </a:srgbClr>
             </a:outerShdw>
           </a:effectLst>
         </p:spPr>
+        <p:txBody>
+          <a:bodyPr/>
+          <a:lstStyle/>
+          <a:p>
+            <a:endParaRPr lang="en-IN"/>
+          </a:p>
+        </p:txBody>
       </p:sp>
       <p:sp>
         <p:nvSpPr>
@@ -2626,7 +2428,7 @@
           <a:bodyPr wrap="square" lIns="0" tIns="0" rIns="0" bIns="0" rtlCol="0" anchor="ctr"/>
           <a:lstStyle/>
           <a:p>
-            <a:pPr algn="ctr" indent="0" marL="0">
+            <a:pPr marL="0" indent="0" algn="ctr">
               <a:buNone/>
             </a:pPr>
             <a:r>
@@ -2665,7 +2467,7 @@
           <a:bodyPr wrap="square" lIns="0" tIns="0" rIns="0" bIns="0" rtlCol="0" anchor="ctr"/>
           <a:lstStyle/>
           <a:p>
-            <a:pPr algn="ctr" indent="0" marL="0">
+            <a:pPr marL="0" indent="0" algn="ctr">
               <a:lnSpc>
                 <a:spcPts val="1500"/>
               </a:lnSpc>
@@ -2685,7 +2487,7 @@
             <a:endParaRPr lang="en-US" sz="1200" dirty="0"/>
           </a:p>
           <a:p>
-            <a:pPr algn="ctr" indent="0" marL="0">
+            <a:pPr marL="0" indent="0" algn="ctr">
               <a:lnSpc>
                 <a:spcPts val="1500"/>
               </a:lnSpc>
@@ -2732,13 +2534,20 @@
             <a:prstDash val="solid"/>
           </a:ln>
           <a:effectLst>
-            <a:outerShdw sx="100000" sy="100000" kx="0" ky="0" algn="bl" rotWithShape="0" blurRad="101600" dist="25400" dir="5400000">
+            <a:outerShdw blurRad="101600" dist="25400" dir="5400000" algn="bl" rotWithShape="0">
               <a:srgbClr val="B9B2CE">
                 <a:alpha val="35000"/>
               </a:srgbClr>
             </a:outerShdw>
           </a:effectLst>
         </p:spPr>
+        <p:txBody>
+          <a:bodyPr/>
+          <a:lstStyle/>
+          <a:p>
+            <a:endParaRPr lang="en-IN"/>
+          </a:p>
+        </p:txBody>
       </p:sp>
       <p:sp>
         <p:nvSpPr>
@@ -2761,7 +2570,7 @@
           <a:bodyPr wrap="square" lIns="0" tIns="0" rIns="0" bIns="0" rtlCol="0" anchor="ctr"/>
           <a:lstStyle/>
           <a:p>
-            <a:pPr algn="ctr" indent="0" marL="0">
+            <a:pPr marL="0" indent="0" algn="ctr">
               <a:buNone/>
             </a:pPr>
             <a:r>
@@ -2800,7 +2609,7 @@
           <a:bodyPr wrap="square" lIns="0" tIns="0" rIns="0" bIns="0" rtlCol="0" anchor="ctr"/>
           <a:lstStyle/>
           <a:p>
-            <a:pPr algn="ctr" indent="0" marL="0">
+            <a:pPr marL="0" indent="0" algn="ctr">
               <a:lnSpc>
                 <a:spcPts val="1500"/>
               </a:lnSpc>
@@ -2820,7 +2629,7 @@
             <a:endParaRPr lang="en-US" sz="1200" dirty="0"/>
           </a:p>
           <a:p>
-            <a:pPr algn="ctr" indent="0" marL="0">
+            <a:pPr marL="0" indent="0" algn="ctr">
               <a:lnSpc>
                 <a:spcPts val="1500"/>
               </a:lnSpc>
@@ -2867,13 +2676,20 @@
             <a:prstDash val="solid"/>
           </a:ln>
           <a:effectLst>
-            <a:outerShdw sx="100000" sy="100000" kx="0" ky="0" algn="bl" rotWithShape="0" blurRad="101600" dist="25400" dir="5400000">
+            <a:outerShdw blurRad="101600" dist="25400" dir="5400000" algn="bl" rotWithShape="0">
               <a:srgbClr val="B9B2CE">
                 <a:alpha val="35000"/>
               </a:srgbClr>
             </a:outerShdw>
           </a:effectLst>
         </p:spPr>
+        <p:txBody>
+          <a:bodyPr/>
+          <a:lstStyle/>
+          <a:p>
+            <a:endParaRPr lang="en-IN"/>
+          </a:p>
+        </p:txBody>
       </p:sp>
       <p:sp>
         <p:nvSpPr>
@@ -2896,7 +2712,7 @@
           <a:bodyPr wrap="square" lIns="0" tIns="0" rIns="0" bIns="0" rtlCol="0" anchor="ctr"/>
           <a:lstStyle/>
           <a:p>
-            <a:pPr algn="ctr" indent="0" marL="0">
+            <a:pPr marL="0" indent="0" algn="ctr">
               <a:buNone/>
             </a:pPr>
             <a:r>
@@ -2935,7 +2751,7 @@
           <a:bodyPr wrap="square" lIns="0" tIns="0" rIns="0" bIns="0" rtlCol="0" anchor="ctr"/>
           <a:lstStyle/>
           <a:p>
-            <a:pPr algn="ctr" indent="0" marL="0">
+            <a:pPr marL="0" indent="0" algn="ctr">
               <a:lnSpc>
                 <a:spcPts val="1500"/>
               </a:lnSpc>
@@ -2955,7 +2771,7 @@
             <a:endParaRPr lang="en-US" sz="1200" dirty="0"/>
           </a:p>
           <a:p>
-            <a:pPr algn="ctr" indent="0" marL="0">
+            <a:pPr marL="0" indent="0" algn="ctr">
               <a:lnSpc>
                 <a:spcPts val="1500"/>
               </a:lnSpc>
@@ -2999,7 +2815,7 @@
           <a:bodyPr wrap="square" lIns="152400" tIns="152400" rIns="152400" bIns="152400" rtlCol="0" anchor="ctr"/>
           <a:lstStyle/>
           <a:p>
-            <a:pPr indent="0" marL="0">
+            <a:pPr marL="0" indent="0">
               <a:lnSpc>
                 <a:spcPts val="1600"/>
               </a:lnSpc>
@@ -3019,7 +2835,7 @@
             <a:endParaRPr lang="en-US" sz="1100" dirty="0"/>
           </a:p>
           <a:p>
-            <a:pPr indent="0" marL="0">
+            <a:pPr marL="0" indent="0">
               <a:lnSpc>
                 <a:spcPts val="1600"/>
               </a:lnSpc>
@@ -3039,7 +2855,7 @@
             <a:endParaRPr lang="en-US" sz="1100" dirty="0"/>
           </a:p>
           <a:p>
-            <a:pPr indent="0" marL="0">
+            <a:pPr marL="0" indent="0">
               <a:lnSpc>
                 <a:spcPts val="1600"/>
               </a:lnSpc>
@@ -3059,7 +2875,7 @@
             <a:endParaRPr lang="en-US" sz="1100" dirty="0"/>
           </a:p>
           <a:p>
-            <a:pPr indent="0" marL="0">
+            <a:pPr marL="0" indent="0">
               <a:lnSpc>
                 <a:spcPts val="1600"/>
               </a:lnSpc>
@@ -3079,7 +2895,7 @@
             <a:endParaRPr lang="en-US" sz="1100" dirty="0"/>
           </a:p>
           <a:p>
-            <a:pPr indent="0" marL="0">
+            <a:pPr marL="0" indent="0">
               <a:lnSpc>
                 <a:spcPts val="1600"/>
               </a:lnSpc>
@@ -3099,7 +2915,7 @@
             <a:endParaRPr lang="en-US" sz="1100" dirty="0"/>
           </a:p>
           <a:p>
-            <a:pPr indent="0" marL="0">
+            <a:pPr marL="0" indent="0">
               <a:lnSpc>
                 <a:spcPts val="1600"/>
               </a:lnSpc>
@@ -3119,7 +2935,7 @@
             <a:endParaRPr lang="en-US" sz="1100" dirty="0"/>
           </a:p>
           <a:p>
-            <a:pPr indent="0" marL="0">
+            <a:pPr marL="0" indent="0">
               <a:lnSpc>
                 <a:spcPts val="1600"/>
               </a:lnSpc>
@@ -3161,7 +2977,7 @@
           <a:bodyPr wrap="square" lIns="0" tIns="0" rIns="0" bIns="0" rtlCol="0" anchor="ctr"/>
           <a:lstStyle/>
           <a:p>
-            <a:pPr indent="0" marL="0">
+            <a:pPr marL="0" indent="0">
               <a:buNone/>
             </a:pPr>
             <a:r>
@@ -3289,6 +3105,7 @@
         <a:solidFill>
           <a:srgbClr val="FFFFFF"/>
         </a:solidFill>
+        <a:effectLst/>
       </p:bgPr>
     </p:bg>
     <p:spTree>
@@ -3326,11 +3143,11 @@
           <a:bodyPr wrap="square" lIns="0" tIns="0" rIns="0" bIns="0" rtlCol="0" anchor="ctr"/>
           <a:lstStyle/>
           <a:p>
-            <a:pPr indent="0" marL="0">
-              <a:buNone/>
-            </a:pPr>
-            <a:r>
-              <a:rPr lang="en-US" sz="1100" b="1" spc="200" kern="0" dirty="0">
+            <a:pPr marL="0" indent="0">
+              <a:buNone/>
+            </a:pPr>
+            <a:r>
+              <a:rPr lang="en-US" sz="1100" b="1" kern="0" spc="200" dirty="0">
                 <a:solidFill>
                   <a:srgbClr val="6B46C1"/>
                 </a:solidFill>
@@ -3365,7 +3182,7 @@
           <a:bodyPr wrap="square" lIns="0" tIns="0" rIns="0" bIns="0" rtlCol="0" anchor="ctr"/>
           <a:lstStyle/>
           <a:p>
-            <a:pPr indent="0" marL="0">
+            <a:pPr marL="0" indent="0">
               <a:buNone/>
             </a:pPr>
             <a:r>
@@ -3409,13 +3226,20 @@
             <a:prstDash val="solid"/>
           </a:ln>
           <a:effectLst>
-            <a:outerShdw sx="100000" sy="100000" kx="0" ky="0" algn="bl" rotWithShape="0" blurRad="101600" dist="25400" dir="5400000">
+            <a:outerShdw blurRad="101600" dist="25400" dir="5400000" algn="bl" rotWithShape="0">
               <a:srgbClr val="B9B2CE">
                 <a:alpha val="35000"/>
               </a:srgbClr>
             </a:outerShdw>
           </a:effectLst>
         </p:spPr>
+        <p:txBody>
+          <a:bodyPr/>
+          <a:lstStyle/>
+          <a:p>
+            <a:endParaRPr lang="en-IN"/>
+          </a:p>
+        </p:txBody>
       </p:sp>
       <p:sp>
         <p:nvSpPr>
@@ -3436,6 +3260,13 @@
           </a:solidFill>
           <a:ln/>
         </p:spPr>
+        <p:txBody>
+          <a:bodyPr/>
+          <a:lstStyle/>
+          <a:p>
+            <a:endParaRPr lang="en-IN"/>
+          </a:p>
+        </p:txBody>
       </p:sp>
       <p:sp>
         <p:nvSpPr>
@@ -3458,7 +3289,7 @@
           <a:bodyPr wrap="square" lIns="0" tIns="0" rIns="0" bIns="0" rtlCol="0" anchor="ctr"/>
           <a:lstStyle/>
           <a:p>
-            <a:pPr indent="0" marL="0">
+            <a:pPr marL="0" indent="0">
               <a:buNone/>
             </a:pPr>
             <a:r>
@@ -3620,13 +3451,20 @@
             <a:prstDash val="solid"/>
           </a:ln>
           <a:effectLst>
-            <a:outerShdw sx="100000" sy="100000" kx="0" ky="0" algn="bl" rotWithShape="0" blurRad="101600" dist="25400" dir="5400000">
+            <a:outerShdw blurRad="101600" dist="25400" dir="5400000" algn="bl" rotWithShape="0">
               <a:srgbClr val="B9B2CE">
                 <a:alpha val="35000"/>
               </a:srgbClr>
             </a:outerShdw>
           </a:effectLst>
         </p:spPr>
+        <p:txBody>
+          <a:bodyPr/>
+          <a:lstStyle/>
+          <a:p>
+            <a:endParaRPr lang="en-IN"/>
+          </a:p>
+        </p:txBody>
       </p:sp>
       <p:sp>
         <p:nvSpPr>
@@ -3647,6 +3485,13 @@
           </a:solidFill>
           <a:ln/>
         </p:spPr>
+        <p:txBody>
+          <a:bodyPr/>
+          <a:lstStyle/>
+          <a:p>
+            <a:endParaRPr lang="en-IN"/>
+          </a:p>
+        </p:txBody>
       </p:sp>
       <p:sp>
         <p:nvSpPr>
@@ -3669,7 +3514,7 @@
           <a:bodyPr wrap="square" lIns="0" tIns="0" rIns="0" bIns="0" rtlCol="0" anchor="ctr"/>
           <a:lstStyle/>
           <a:p>
-            <a:pPr indent="0" marL="0">
+            <a:pPr marL="0" indent="0">
               <a:buNone/>
             </a:pPr>
             <a:r>
@@ -3831,13 +3676,20 @@
             <a:prstDash val="solid"/>
           </a:ln>
           <a:effectLst>
-            <a:outerShdw sx="100000" sy="100000" kx="0" ky="0" algn="bl" rotWithShape="0" blurRad="101600" dist="25400" dir="5400000">
+            <a:outerShdw blurRad="101600" dist="25400" dir="5400000" algn="bl" rotWithShape="0">
               <a:srgbClr val="B9B2CE">
                 <a:alpha val="35000"/>
               </a:srgbClr>
             </a:outerShdw>
           </a:effectLst>
         </p:spPr>
+        <p:txBody>
+          <a:bodyPr/>
+          <a:lstStyle/>
+          <a:p>
+            <a:endParaRPr lang="en-IN"/>
+          </a:p>
+        </p:txBody>
       </p:sp>
       <p:sp>
         <p:nvSpPr>
@@ -3858,6 +3710,13 @@
           </a:solidFill>
           <a:ln/>
         </p:spPr>
+        <p:txBody>
+          <a:bodyPr/>
+          <a:lstStyle/>
+          <a:p>
+            <a:endParaRPr lang="en-IN"/>
+          </a:p>
+        </p:txBody>
       </p:sp>
       <p:sp>
         <p:nvSpPr>
@@ -3880,7 +3739,7 @@
           <a:bodyPr wrap="square" lIns="0" tIns="0" rIns="0" bIns="0" rtlCol="0" anchor="ctr"/>
           <a:lstStyle/>
           <a:p>
-            <a:pPr indent="0" marL="0">
+            <a:pPr marL="0" indent="0">
               <a:buNone/>
             </a:pPr>
             <a:r>
@@ -4032,6 +3891,7 @@
         <a:solidFill>
           <a:srgbClr val="FFFFFF"/>
         </a:solidFill>
+        <a:effectLst/>
       </p:bgPr>
     </p:bg>
     <p:spTree>
@@ -4069,11 +3929,11 @@
           <a:bodyPr wrap="square" lIns="0" tIns="0" rIns="0" bIns="0" rtlCol="0" anchor="ctr"/>
           <a:lstStyle/>
           <a:p>
-            <a:pPr indent="0" marL="0">
-              <a:buNone/>
-            </a:pPr>
-            <a:r>
-              <a:rPr lang="en-US" sz="1100" b="1" spc="200" kern="0" dirty="0">
+            <a:pPr marL="0" indent="0">
+              <a:buNone/>
+            </a:pPr>
+            <a:r>
+              <a:rPr lang="en-US" sz="1100" b="1" kern="0" spc="200" dirty="0">
                 <a:solidFill>
                   <a:srgbClr val="6B46C1"/>
                 </a:solidFill>
@@ -4108,7 +3968,7 @@
           <a:bodyPr wrap="square" lIns="0" tIns="0" rIns="0" bIns="0" rtlCol="0" anchor="ctr"/>
           <a:lstStyle/>
           <a:p>
-            <a:pPr indent="0" marL="0">
+            <a:pPr marL="0" indent="0">
               <a:buNone/>
             </a:pPr>
             <a:r>
@@ -4152,13 +4012,20 @@
             <a:prstDash val="solid"/>
           </a:ln>
           <a:effectLst>
-            <a:outerShdw sx="100000" sy="100000" kx="0" ky="0" algn="bl" rotWithShape="0" blurRad="101600" dist="25400" dir="5400000">
+            <a:outerShdw blurRad="101600" dist="25400" dir="5400000" algn="bl" rotWithShape="0">
               <a:srgbClr val="B9B2CE">
                 <a:alpha val="35000"/>
               </a:srgbClr>
             </a:outerShdw>
           </a:effectLst>
         </p:spPr>
+        <p:txBody>
+          <a:bodyPr/>
+          <a:lstStyle/>
+          <a:p>
+            <a:endParaRPr lang="en-IN"/>
+          </a:p>
+        </p:txBody>
       </p:sp>
       <p:sp>
         <p:nvSpPr>
@@ -4181,7 +4048,7 @@
           <a:bodyPr wrap="square" lIns="0" tIns="0" rIns="0" bIns="0" rtlCol="0" anchor="ctr"/>
           <a:lstStyle/>
           <a:p>
-            <a:pPr indent="0" marL="0">
+            <a:pPr marL="0" indent="0">
               <a:buNone/>
             </a:pPr>
             <a:r>
@@ -4220,7 +4087,7 @@
           <a:bodyPr wrap="square" lIns="0" tIns="0" rIns="0" bIns="0" rtlCol="0" anchor="ctr"/>
           <a:lstStyle/>
           <a:p>
-            <a:pPr indent="0" marL="0">
+            <a:pPr marL="0" indent="0">
               <a:buNone/>
             </a:pPr>
             <a:r>
@@ -4264,13 +4131,20 @@
             <a:prstDash val="solid"/>
           </a:ln>
           <a:effectLst>
-            <a:outerShdw sx="100000" sy="100000" kx="0" ky="0" algn="bl" rotWithShape="0" blurRad="101600" dist="25400" dir="5400000">
+            <a:outerShdw blurRad="101600" dist="25400" dir="5400000" algn="bl" rotWithShape="0">
               <a:srgbClr val="B9B2CE">
                 <a:alpha val="35000"/>
               </a:srgbClr>
             </a:outerShdw>
           </a:effectLst>
         </p:spPr>
+        <p:txBody>
+          <a:bodyPr/>
+          <a:lstStyle/>
+          <a:p>
+            <a:endParaRPr lang="en-IN"/>
+          </a:p>
+        </p:txBody>
       </p:sp>
       <p:sp>
         <p:nvSpPr>
@@ -4293,7 +4167,7 @@
           <a:bodyPr wrap="square" lIns="0" tIns="0" rIns="0" bIns="0" rtlCol="0" anchor="ctr"/>
           <a:lstStyle/>
           <a:p>
-            <a:pPr indent="0" marL="0">
+            <a:pPr marL="0" indent="0">
               <a:buNone/>
             </a:pPr>
             <a:r>
@@ -4332,7 +4206,7 @@
           <a:bodyPr wrap="square" lIns="0" tIns="0" rIns="0" bIns="0" rtlCol="0" anchor="ctr"/>
           <a:lstStyle/>
           <a:p>
-            <a:pPr indent="0" marL="0">
+            <a:pPr marL="0" indent="0">
               <a:buNone/>
             </a:pPr>
             <a:r>
@@ -4376,13 +4250,20 @@
             <a:prstDash val="solid"/>
           </a:ln>
           <a:effectLst>
-            <a:outerShdw sx="100000" sy="100000" kx="0" ky="0" algn="bl" rotWithShape="0" blurRad="101600" dist="25400" dir="5400000">
+            <a:outerShdw blurRad="101600" dist="25400" dir="5400000" algn="bl" rotWithShape="0">
               <a:srgbClr val="B9B2CE">
                 <a:alpha val="35000"/>
               </a:srgbClr>
             </a:outerShdw>
           </a:effectLst>
         </p:spPr>
+        <p:txBody>
+          <a:bodyPr/>
+          <a:lstStyle/>
+          <a:p>
+            <a:endParaRPr lang="en-IN"/>
+          </a:p>
+        </p:txBody>
       </p:sp>
       <p:sp>
         <p:nvSpPr>
@@ -4405,7 +4286,7 @@
           <a:bodyPr wrap="square" lIns="0" tIns="0" rIns="0" bIns="0" rtlCol="0" anchor="ctr"/>
           <a:lstStyle/>
           <a:p>
-            <a:pPr indent="0" marL="0">
+            <a:pPr marL="0" indent="0">
               <a:buNone/>
             </a:pPr>
             <a:r>
@@ -4444,7 +4325,7 @@
           <a:bodyPr wrap="square" lIns="0" tIns="0" rIns="0" bIns="0" rtlCol="0" anchor="ctr"/>
           <a:lstStyle/>
           <a:p>
-            <a:pPr indent="0" marL="0">
+            <a:pPr marL="0" indent="0">
               <a:buNone/>
             </a:pPr>
             <a:r>
@@ -4488,13 +4369,20 @@
             <a:prstDash val="solid"/>
           </a:ln>
           <a:effectLst>
-            <a:outerShdw sx="100000" sy="100000" kx="0" ky="0" algn="bl" rotWithShape="0" blurRad="101600" dist="25400" dir="5400000">
+            <a:outerShdw blurRad="101600" dist="25400" dir="5400000" algn="bl" rotWithShape="0">
               <a:srgbClr val="B9B2CE">
                 <a:alpha val="35000"/>
               </a:srgbClr>
             </a:outerShdw>
           </a:effectLst>
         </p:spPr>
+        <p:txBody>
+          <a:bodyPr/>
+          <a:lstStyle/>
+          <a:p>
+            <a:endParaRPr lang="en-IN"/>
+          </a:p>
+        </p:txBody>
       </p:sp>
       <p:sp>
         <p:nvSpPr>
@@ -4517,7 +4405,7 @@
           <a:bodyPr wrap="square" lIns="0" tIns="0" rIns="0" bIns="0" rtlCol="0" anchor="ctr"/>
           <a:lstStyle/>
           <a:p>
-            <a:pPr indent="0" marL="0">
+            <a:pPr marL="0" indent="0">
               <a:buNone/>
             </a:pPr>
             <a:r>
@@ -4556,7 +4444,7 @@
           <a:bodyPr wrap="square" lIns="0" tIns="0" rIns="0" bIns="0" rtlCol="0" anchor="ctr"/>
           <a:lstStyle/>
           <a:p>
-            <a:pPr indent="0" marL="0">
+            <a:pPr marL="0" indent="0">
               <a:buNone/>
             </a:pPr>
             <a:r>
@@ -4600,13 +4488,20 @@
             <a:prstDash val="solid"/>
           </a:ln>
           <a:effectLst>
-            <a:outerShdw sx="100000" sy="100000" kx="0" ky="0" algn="bl" rotWithShape="0" blurRad="101600" dist="25400" dir="5400000">
+            <a:outerShdw blurRad="101600" dist="25400" dir="5400000" algn="bl" rotWithShape="0">
               <a:srgbClr val="B9B2CE">
                 <a:alpha val="35000"/>
               </a:srgbClr>
             </a:outerShdw>
           </a:effectLst>
         </p:spPr>
+        <p:txBody>
+          <a:bodyPr/>
+          <a:lstStyle/>
+          <a:p>
+            <a:endParaRPr lang="en-IN"/>
+          </a:p>
+        </p:txBody>
       </p:sp>
       <p:sp>
         <p:nvSpPr>
@@ -4629,7 +4524,7 @@
           <a:bodyPr wrap="square" lIns="0" tIns="0" rIns="0" bIns="0" rtlCol="0" anchor="ctr"/>
           <a:lstStyle/>
           <a:p>
-            <a:pPr indent="0" marL="0">
+            <a:pPr marL="0" indent="0">
               <a:buNone/>
             </a:pPr>
             <a:r>
@@ -4668,7 +4563,7 @@
           <a:bodyPr wrap="square" lIns="0" tIns="0" rIns="0" bIns="0" rtlCol="0" anchor="ctr"/>
           <a:lstStyle/>
           <a:p>
-            <a:pPr indent="0" marL="0">
+            <a:pPr marL="0" indent="0">
               <a:buNone/>
             </a:pPr>
             <a:r>
@@ -4712,13 +4607,20 @@
             <a:prstDash val="solid"/>
           </a:ln>
           <a:effectLst>
-            <a:outerShdw sx="100000" sy="100000" kx="0" ky="0" algn="bl" rotWithShape="0" blurRad="101600" dist="25400" dir="5400000">
+            <a:outerShdw blurRad="101600" dist="25400" dir="5400000" algn="bl" rotWithShape="0">
               <a:srgbClr val="B9B2CE">
                 <a:alpha val="35000"/>
               </a:srgbClr>
             </a:outerShdw>
           </a:effectLst>
         </p:spPr>
+        <p:txBody>
+          <a:bodyPr/>
+          <a:lstStyle/>
+          <a:p>
+            <a:endParaRPr lang="en-IN"/>
+          </a:p>
+        </p:txBody>
       </p:sp>
       <p:sp>
         <p:nvSpPr>
@@ -4741,7 +4643,7 @@
           <a:bodyPr wrap="square" lIns="0" tIns="0" rIns="0" bIns="0" rtlCol="0" anchor="ctr"/>
           <a:lstStyle/>
           <a:p>
-            <a:pPr indent="0" marL="0">
+            <a:pPr marL="0" indent="0">
               <a:buNone/>
             </a:pPr>
             <a:r>
@@ -4780,7 +4682,7 @@
           <a:bodyPr wrap="square" lIns="0" tIns="0" rIns="0" bIns="0" rtlCol="0" anchor="ctr"/>
           <a:lstStyle/>
           <a:p>
-            <a:pPr indent="0" marL="0">
+            <a:pPr marL="0" indent="0">
               <a:buNone/>
             </a:pPr>
             <a:r>
@@ -4824,13 +4726,20 @@
             <a:prstDash val="solid"/>
           </a:ln>
           <a:effectLst>
-            <a:outerShdw sx="100000" sy="100000" kx="0" ky="0" algn="bl" rotWithShape="0" blurRad="101600" dist="25400" dir="5400000">
+            <a:outerShdw blurRad="101600" dist="25400" dir="5400000" algn="bl" rotWithShape="0">
               <a:srgbClr val="B9B2CE">
                 <a:alpha val="35000"/>
               </a:srgbClr>
             </a:outerShdw>
           </a:effectLst>
         </p:spPr>
+        <p:txBody>
+          <a:bodyPr/>
+          <a:lstStyle/>
+          <a:p>
+            <a:endParaRPr lang="en-IN"/>
+          </a:p>
+        </p:txBody>
       </p:sp>
       <p:sp>
         <p:nvSpPr>
@@ -4853,7 +4762,7 @@
           <a:bodyPr wrap="square" lIns="0" tIns="0" rIns="0" bIns="0" rtlCol="0" anchor="ctr"/>
           <a:lstStyle/>
           <a:p>
-            <a:pPr indent="0" marL="0">
+            <a:pPr marL="0" indent="0">
               <a:buNone/>
             </a:pPr>
             <a:r>
@@ -4892,7 +4801,7 @@
           <a:bodyPr wrap="square" lIns="0" tIns="0" rIns="0" bIns="0" rtlCol="0" anchor="ctr"/>
           <a:lstStyle/>
           <a:p>
-            <a:pPr indent="0" marL="0">
+            <a:pPr marL="0" indent="0">
               <a:buNone/>
             </a:pPr>
             <a:r>
@@ -4936,13 +4845,20 @@
             <a:prstDash val="solid"/>
           </a:ln>
           <a:effectLst>
-            <a:outerShdw sx="100000" sy="100000" kx="0" ky="0" algn="bl" rotWithShape="0" blurRad="101600" dist="25400" dir="5400000">
+            <a:outerShdw blurRad="101600" dist="25400" dir="5400000" algn="bl" rotWithShape="0">
               <a:srgbClr val="B9B2CE">
                 <a:alpha val="35000"/>
               </a:srgbClr>
             </a:outerShdw>
           </a:effectLst>
         </p:spPr>
+        <p:txBody>
+          <a:bodyPr/>
+          <a:lstStyle/>
+          <a:p>
+            <a:endParaRPr lang="en-IN"/>
+          </a:p>
+        </p:txBody>
       </p:sp>
       <p:sp>
         <p:nvSpPr>
@@ -4965,7 +4881,7 @@
           <a:bodyPr wrap="square" lIns="0" tIns="0" rIns="0" bIns="0" rtlCol="0" anchor="ctr"/>
           <a:lstStyle/>
           <a:p>
-            <a:pPr indent="0" marL="0">
+            <a:pPr marL="0" indent="0">
               <a:buNone/>
             </a:pPr>
             <a:r>
@@ -5004,7 +4920,7 @@
           <a:bodyPr wrap="square" lIns="0" tIns="0" rIns="0" bIns="0" rtlCol="0" anchor="ctr"/>
           <a:lstStyle/>
           <a:p>
-            <a:pPr indent="0" marL="0">
+            <a:pPr marL="0" indent="0">
               <a:buNone/>
             </a:pPr>
             <a:r>
@@ -5048,13 +4964,20 @@
             <a:prstDash val="solid"/>
           </a:ln>
           <a:effectLst>
-            <a:outerShdw sx="100000" sy="100000" kx="0" ky="0" algn="bl" rotWithShape="0" blurRad="101600" dist="25400" dir="5400000">
+            <a:outerShdw blurRad="101600" dist="25400" dir="5400000" algn="bl" rotWithShape="0">
               <a:srgbClr val="B9B2CE">
                 <a:alpha val="35000"/>
               </a:srgbClr>
             </a:outerShdw>
           </a:effectLst>
         </p:spPr>
+        <p:txBody>
+          <a:bodyPr/>
+          <a:lstStyle/>
+          <a:p>
+            <a:endParaRPr lang="en-IN"/>
+          </a:p>
+        </p:txBody>
       </p:sp>
       <p:sp>
         <p:nvSpPr>
@@ -5077,7 +5000,7 @@
           <a:bodyPr wrap="square" lIns="0" tIns="0" rIns="0" bIns="0" rtlCol="0" anchor="ctr"/>
           <a:lstStyle/>
           <a:p>
-            <a:pPr indent="0" marL="0">
+            <a:pPr marL="0" indent="0">
               <a:buNone/>
             </a:pPr>
             <a:r>
@@ -5116,7 +5039,7 @@
           <a:bodyPr wrap="square" lIns="0" tIns="0" rIns="0" bIns="0" rtlCol="0" anchor="ctr"/>
           <a:lstStyle/>
           <a:p>
-            <a:pPr indent="0" marL="0">
+            <a:pPr marL="0" indent="0">
               <a:buNone/>
             </a:pPr>
             <a:r>
@@ -5160,13 +5083,20 @@
             <a:prstDash val="solid"/>
           </a:ln>
           <a:effectLst>
-            <a:outerShdw sx="100000" sy="100000" kx="0" ky="0" algn="bl" rotWithShape="0" blurRad="101600" dist="25400" dir="5400000">
+            <a:outerShdw blurRad="101600" dist="25400" dir="5400000" algn="bl" rotWithShape="0">
               <a:srgbClr val="B9B2CE">
                 <a:alpha val="35000"/>
               </a:srgbClr>
             </a:outerShdw>
           </a:effectLst>
         </p:spPr>
+        <p:txBody>
+          <a:bodyPr/>
+          <a:lstStyle/>
+          <a:p>
+            <a:endParaRPr lang="en-IN"/>
+          </a:p>
+        </p:txBody>
       </p:sp>
       <p:sp>
         <p:nvSpPr>
@@ -5189,7 +5119,7 @@
           <a:bodyPr wrap="square" lIns="0" tIns="0" rIns="0" bIns="0" rtlCol="0" anchor="ctr"/>
           <a:lstStyle/>
           <a:p>
-            <a:pPr indent="0" marL="0">
+            <a:pPr marL="0" indent="0">
               <a:buNone/>
             </a:pPr>
             <a:r>
@@ -5228,7 +5158,7 @@
           <a:bodyPr wrap="square" lIns="0" tIns="0" rIns="0" bIns="0" rtlCol="0" anchor="ctr"/>
           <a:lstStyle/>
           <a:p>
-            <a:pPr indent="0" marL="0">
+            <a:pPr marL="0" indent="0">
               <a:buNone/>
             </a:pPr>
             <a:r>
@@ -5272,13 +5202,20 @@
             <a:prstDash val="solid"/>
           </a:ln>
           <a:effectLst>
-            <a:outerShdw sx="100000" sy="100000" kx="0" ky="0" algn="bl" rotWithShape="0" blurRad="101600" dist="25400" dir="5400000">
+            <a:outerShdw blurRad="101600" dist="25400" dir="5400000" algn="bl" rotWithShape="0">
               <a:srgbClr val="B9B2CE">
                 <a:alpha val="35000"/>
               </a:srgbClr>
             </a:outerShdw>
           </a:effectLst>
         </p:spPr>
+        <p:txBody>
+          <a:bodyPr/>
+          <a:lstStyle/>
+          <a:p>
+            <a:endParaRPr lang="en-IN"/>
+          </a:p>
+        </p:txBody>
       </p:sp>
       <p:sp>
         <p:nvSpPr>
@@ -5301,7 +5238,7 @@
           <a:bodyPr wrap="square" lIns="0" tIns="0" rIns="0" bIns="0" rtlCol="0" anchor="ctr"/>
           <a:lstStyle/>
           <a:p>
-            <a:pPr indent="0" marL="0">
+            <a:pPr marL="0" indent="0">
               <a:buNone/>
             </a:pPr>
             <a:r>
@@ -5340,7 +5277,7 @@
           <a:bodyPr wrap="square" lIns="0" tIns="0" rIns="0" bIns="0" rtlCol="0" anchor="ctr"/>
           <a:lstStyle/>
           <a:p>
-            <a:pPr indent="0" marL="0">
+            <a:pPr marL="0" indent="0">
               <a:buNone/>
             </a:pPr>
             <a:r>
@@ -5384,13 +5321,20 @@
             <a:prstDash val="solid"/>
           </a:ln>
           <a:effectLst>
-            <a:outerShdw sx="100000" sy="100000" kx="0" ky="0" algn="bl" rotWithShape="0" blurRad="101600" dist="25400" dir="5400000">
+            <a:outerShdw blurRad="101600" dist="25400" dir="5400000" algn="bl" rotWithShape="0">
               <a:srgbClr val="B9B2CE">
                 <a:alpha val="35000"/>
               </a:srgbClr>
             </a:outerShdw>
           </a:effectLst>
         </p:spPr>
+        <p:txBody>
+          <a:bodyPr/>
+          <a:lstStyle/>
+          <a:p>
+            <a:endParaRPr lang="en-IN"/>
+          </a:p>
+        </p:txBody>
       </p:sp>
       <p:sp>
         <p:nvSpPr>
@@ -5413,7 +5357,7 @@
           <a:bodyPr wrap="square" lIns="0" tIns="0" rIns="0" bIns="0" rtlCol="0" anchor="ctr"/>
           <a:lstStyle/>
           <a:p>
-            <a:pPr indent="0" marL="0">
+            <a:pPr marL="0" indent="0">
               <a:buNone/>
             </a:pPr>
             <a:r>
@@ -5452,7 +5396,7 @@
           <a:bodyPr wrap="square" lIns="0" tIns="0" rIns="0" bIns="0" rtlCol="0" anchor="ctr"/>
           <a:lstStyle/>
           <a:p>
-            <a:pPr indent="0" marL="0">
+            <a:pPr marL="0" indent="0">
               <a:buNone/>
             </a:pPr>
             <a:r>
@@ -5486,6 +5430,7 @@
         <a:solidFill>
           <a:srgbClr val="FFFFFF"/>
         </a:solidFill>
+        <a:effectLst/>
       </p:bgPr>
     </p:bg>
     <p:spTree>
@@ -5523,11 +5468,11 @@
           <a:bodyPr wrap="square" lIns="0" tIns="0" rIns="0" bIns="0" rtlCol="0" anchor="ctr"/>
           <a:lstStyle/>
           <a:p>
-            <a:pPr indent="0" marL="0">
-              <a:buNone/>
-            </a:pPr>
-            <a:r>
-              <a:rPr lang="en-US" sz="1100" b="1" spc="200" kern="0" dirty="0">
+            <a:pPr marL="0" indent="0">
+              <a:buNone/>
+            </a:pPr>
+            <a:r>
+              <a:rPr lang="en-US" sz="1100" b="1" kern="0" spc="200" dirty="0">
                 <a:solidFill>
                   <a:srgbClr val="6B46C1"/>
                 </a:solidFill>
@@ -5562,7 +5507,7 @@
           <a:bodyPr wrap="square" lIns="0" tIns="0" rIns="0" bIns="0" rtlCol="0" anchor="ctr"/>
           <a:lstStyle/>
           <a:p>
-            <a:pPr indent="0" marL="0">
+            <a:pPr marL="0" indent="0">
               <a:buNone/>
             </a:pPr>
             <a:r>
@@ -5606,13 +5551,20 @@
             <a:prstDash val="solid"/>
           </a:ln>
           <a:effectLst>
-            <a:outerShdw sx="100000" sy="100000" kx="0" ky="0" algn="bl" rotWithShape="0" blurRad="101600" dist="25400" dir="5400000">
+            <a:outerShdw blurRad="101600" dist="25400" dir="5400000" algn="bl" rotWithShape="0">
               <a:srgbClr val="B9B2CE">
                 <a:alpha val="35000"/>
               </a:srgbClr>
             </a:outerShdw>
           </a:effectLst>
         </p:spPr>
+        <p:txBody>
+          <a:bodyPr/>
+          <a:lstStyle/>
+          <a:p>
+            <a:endParaRPr lang="en-IN"/>
+          </a:p>
+        </p:txBody>
       </p:sp>
       <p:sp>
         <p:nvSpPr>
@@ -5635,7 +5587,7 @@
           <a:bodyPr wrap="square" lIns="0" tIns="0" rIns="0" bIns="0" rtlCol="0" anchor="ctr"/>
           <a:lstStyle/>
           <a:p>
-            <a:pPr indent="0" marL="0">
+            <a:pPr marL="0" indent="0">
               <a:buNone/>
             </a:pPr>
             <a:r>
@@ -5816,7 +5768,7 @@
           <a:bodyPr wrap="square" lIns="0" tIns="0" rIns="0" bIns="0" rtlCol="0" anchor="ctr"/>
           <a:lstStyle/>
           <a:p>
-            <a:pPr indent="0" marL="0">
+            <a:pPr marL="0" indent="0">
               <a:buNone/>
             </a:pPr>
             <a:r>
@@ -5853,6 +5805,13 @@
           </a:solidFill>
           <a:ln/>
         </p:spPr>
+        <p:txBody>
+          <a:bodyPr/>
+          <a:lstStyle/>
+          <a:p>
+            <a:endParaRPr lang="en-IN"/>
+          </a:p>
+        </p:txBody>
       </p:sp>
       <p:sp>
         <p:nvSpPr>
@@ -5875,7 +5834,7 @@
           <a:bodyPr wrap="square" lIns="0" tIns="0" rIns="0" bIns="0" rtlCol="0" anchor="ctr"/>
           <a:lstStyle/>
           <a:p>
-            <a:pPr algn="ctr" indent="0" marL="0">
+            <a:pPr marL="0" indent="0" algn="ctr">
               <a:buNone/>
             </a:pPr>
             <a:r>
@@ -5914,7 +5873,7 @@
           <a:bodyPr wrap="square" lIns="0" tIns="0" rIns="0" bIns="0" rtlCol="0" anchor="ctr"/>
           <a:lstStyle/>
           <a:p>
-            <a:pPr indent="0" marL="0">
+            <a:pPr marL="0" indent="0">
               <a:buNone/>
             </a:pPr>
             <a:r>
@@ -5953,7 +5912,7 @@
           <a:bodyPr wrap="square" lIns="0" tIns="0" rIns="0" bIns="0" rtlCol="0" anchor="t"/>
           <a:lstStyle/>
           <a:p>
-            <a:pPr indent="0" marL="0">
+            <a:pPr marL="0" indent="0">
               <a:lnSpc>
                 <a:spcPts val="1700"/>
               </a:lnSpc>
@@ -5993,6 +5952,13 @@
           </a:solidFill>
           <a:ln/>
         </p:spPr>
+        <p:txBody>
+          <a:bodyPr/>
+          <a:lstStyle/>
+          <a:p>
+            <a:endParaRPr lang="en-IN"/>
+          </a:p>
+        </p:txBody>
       </p:sp>
       <p:sp>
         <p:nvSpPr>
@@ -6015,7 +5981,7 @@
           <a:bodyPr wrap="square" lIns="0" tIns="0" rIns="0" bIns="0" rtlCol="0" anchor="ctr"/>
           <a:lstStyle/>
           <a:p>
-            <a:pPr algn="ctr" indent="0" marL="0">
+            <a:pPr marL="0" indent="0" algn="ctr">
               <a:buNone/>
             </a:pPr>
             <a:r>
@@ -6054,7 +6020,7 @@
           <a:bodyPr wrap="square" lIns="0" tIns="0" rIns="0" bIns="0" rtlCol="0" anchor="ctr"/>
           <a:lstStyle/>
           <a:p>
-            <a:pPr indent="0" marL="0">
+            <a:pPr marL="0" indent="0">
               <a:buNone/>
             </a:pPr>
             <a:r>
@@ -6093,7 +6059,7 @@
           <a:bodyPr wrap="square" lIns="0" tIns="0" rIns="0" bIns="0" rtlCol="0" anchor="t"/>
           <a:lstStyle/>
           <a:p>
-            <a:pPr indent="0" marL="0">
+            <a:pPr marL="0" indent="0">
               <a:lnSpc>
                 <a:spcPts val="1700"/>
               </a:lnSpc>
@@ -6133,6 +6099,13 @@
           </a:solidFill>
           <a:ln/>
         </p:spPr>
+        <p:txBody>
+          <a:bodyPr/>
+          <a:lstStyle/>
+          <a:p>
+            <a:endParaRPr lang="en-IN"/>
+          </a:p>
+        </p:txBody>
       </p:sp>
       <p:sp>
         <p:nvSpPr>
@@ -6155,7 +6128,7 @@
           <a:bodyPr wrap="square" lIns="0" tIns="0" rIns="0" bIns="0" rtlCol="0" anchor="ctr"/>
           <a:lstStyle/>
           <a:p>
-            <a:pPr algn="ctr" indent="0" marL="0">
+            <a:pPr marL="0" indent="0" algn="ctr">
               <a:buNone/>
             </a:pPr>
             <a:r>
@@ -6194,7 +6167,7 @@
           <a:bodyPr wrap="square" lIns="0" tIns="0" rIns="0" bIns="0" rtlCol="0" anchor="ctr"/>
           <a:lstStyle/>
           <a:p>
-            <a:pPr indent="0" marL="0">
+            <a:pPr marL="0" indent="0">
               <a:buNone/>
             </a:pPr>
             <a:r>
@@ -6233,7 +6206,7 @@
           <a:bodyPr wrap="square" lIns="0" tIns="0" rIns="0" bIns="0" rtlCol="0" anchor="t"/>
           <a:lstStyle/>
           <a:p>
-            <a:pPr indent="0" marL="0">
+            <a:pPr marL="0" indent="0">
               <a:lnSpc>
                 <a:spcPts val="1700"/>
               </a:lnSpc>
@@ -6273,6 +6246,13 @@
           </a:solidFill>
           <a:ln/>
         </p:spPr>
+        <p:txBody>
+          <a:bodyPr/>
+          <a:lstStyle/>
+          <a:p>
+            <a:endParaRPr lang="en-IN"/>
+          </a:p>
+        </p:txBody>
       </p:sp>
       <p:sp>
         <p:nvSpPr>
@@ -6295,7 +6275,7 @@
           <a:bodyPr wrap="square" lIns="0" tIns="0" rIns="0" bIns="0" rtlCol="0" anchor="ctr"/>
           <a:lstStyle/>
           <a:p>
-            <a:pPr algn="ctr" indent="0" marL="0">
+            <a:pPr marL="0" indent="0" algn="ctr">
               <a:buNone/>
             </a:pPr>
             <a:r>
@@ -6334,7 +6314,7 @@
           <a:bodyPr wrap="square" lIns="0" tIns="0" rIns="0" bIns="0" rtlCol="0" anchor="ctr"/>
           <a:lstStyle/>
           <a:p>
-            <a:pPr indent="0" marL="0">
+            <a:pPr marL="0" indent="0">
               <a:buNone/>
             </a:pPr>
             <a:r>
@@ -6373,7 +6353,7 @@
           <a:bodyPr wrap="square" lIns="0" tIns="0" rIns="0" bIns="0" rtlCol="0" anchor="t"/>
           <a:lstStyle/>
           <a:p>
-            <a:pPr indent="0" marL="0">
+            <a:pPr marL="0" indent="0">
               <a:lnSpc>
                 <a:spcPts val="1700"/>
               </a:lnSpc>
@@ -6410,6 +6390,7 @@
         <a:solidFill>
           <a:srgbClr val="2A1B4D"/>
         </a:solidFill>
+        <a:effectLst/>
       </p:bgPr>
     </p:bg>
     <p:spTree>
@@ -6445,6 +6426,13 @@
           </a:solidFill>
           <a:ln/>
         </p:spPr>
+        <p:txBody>
+          <a:bodyPr/>
+          <a:lstStyle/>
+          <a:p>
+            <a:endParaRPr lang="en-IN"/>
+          </a:p>
+        </p:txBody>
       </p:sp>
       <p:sp>
         <p:nvSpPr>
@@ -6465,6 +6453,13 @@
           </a:solidFill>
           <a:ln/>
         </p:spPr>
+        <p:txBody>
+          <a:bodyPr/>
+          <a:lstStyle/>
+          <a:p>
+            <a:endParaRPr lang="en-IN"/>
+          </a:p>
+        </p:txBody>
       </p:sp>
       <p:sp>
         <p:nvSpPr>
@@ -6487,11 +6482,11 @@
           <a:bodyPr wrap="square" lIns="0" tIns="0" rIns="0" bIns="0" rtlCol="0" anchor="ctr"/>
           <a:lstStyle/>
           <a:p>
-            <a:pPr indent="0" marL="0">
-              <a:buNone/>
-            </a:pPr>
-            <a:r>
-              <a:rPr lang="en-US" sz="1300" b="1" spc="300" kern="0" dirty="0">
+            <a:pPr marL="0" indent="0">
+              <a:buNone/>
+            </a:pPr>
+            <a:r>
+              <a:rPr lang="en-US" sz="1300" b="1" kern="0" spc="300" dirty="0">
                 <a:solidFill>
                   <a:srgbClr val="CFC4EE"/>
                 </a:solidFill>
@@ -6526,7 +6521,7 @@
           <a:bodyPr wrap="square" lIns="0" tIns="0" rIns="0" bIns="0" rtlCol="0" anchor="ctr"/>
           <a:lstStyle/>
           <a:p>
-            <a:pPr indent="0" marL="0">
+            <a:pPr marL="0" indent="0">
               <a:lnSpc>
                 <a:spcPts val="4400"/>
               </a:lnSpc>
@@ -6546,7 +6541,7 @@
             <a:endParaRPr lang="en-US" sz="3400" dirty="0"/>
           </a:p>
           <a:p>
-            <a:pPr indent="0" marL="0">
+            <a:pPr marL="0" indent="0">
               <a:lnSpc>
                 <a:spcPts val="4400"/>
               </a:lnSpc>
@@ -6588,7 +6583,7 @@
           <a:bodyPr wrap="square" lIns="0" tIns="0" rIns="0" bIns="0" rtlCol="0" anchor="ctr"/>
           <a:lstStyle/>
           <a:p>
-            <a:pPr indent="0" marL="0">
+            <a:pPr marL="0" indent="0">
               <a:buNone/>
             </a:pPr>
             <a:r>
@@ -6627,7 +6622,7 @@
           <a:bodyPr wrap="square" lIns="0" tIns="0" rIns="0" bIns="0" rtlCol="0" anchor="t"/>
           <a:lstStyle/>
           <a:p>
-            <a:pPr indent="0" marL="0">
+            <a:pPr marL="0" indent="0">
               <a:lnSpc>
                 <a:spcPts val="1800"/>
               </a:lnSpc>
@@ -6669,7 +6664,7 @@
           <a:bodyPr wrap="square" lIns="0" tIns="0" rIns="0" bIns="0" rtlCol="0" anchor="ctr"/>
           <a:lstStyle/>
           <a:p>
-            <a:pPr indent="0" marL="0">
+            <a:pPr marL="0" indent="0">
               <a:buNone/>
             </a:pPr>
             <a:r>
@@ -6708,7 +6703,7 @@
           <a:bodyPr wrap="square" lIns="0" tIns="0" rIns="0" bIns="0" rtlCol="0" anchor="t"/>
           <a:lstStyle/>
           <a:p>
-            <a:pPr indent="0" marL="0">
+            <a:pPr marL="0" indent="0">
               <a:lnSpc>
                 <a:spcPts val="1800"/>
               </a:lnSpc>
@@ -6750,7 +6745,7 @@
           <a:bodyPr wrap="square" lIns="0" tIns="0" rIns="0" bIns="0" rtlCol="0" anchor="ctr"/>
           <a:lstStyle/>
           <a:p>
-            <a:pPr indent="0" marL="0">
+            <a:pPr marL="0" indent="0">
               <a:buNone/>
             </a:pPr>
             <a:r>
@@ -6789,7 +6784,7 @@
           <a:bodyPr wrap="square" lIns="0" tIns="0" rIns="0" bIns="0" rtlCol="0" anchor="t"/>
           <a:lstStyle/>
           <a:p>
-            <a:pPr indent="0" marL="0">
+            <a:pPr marL="0" indent="0">
               <a:lnSpc>
                 <a:spcPts val="1800"/>
               </a:lnSpc>
@@ -6831,7 +6826,7 @@
           <a:bodyPr wrap="square" lIns="0" tIns="0" rIns="0" bIns="0" rtlCol="0" anchor="ctr"/>
           <a:lstStyle/>
           <a:p>
-            <a:pPr indent="0" marL="0">
+            <a:pPr marL="0" indent="0">
               <a:buNone/>
             </a:pPr>
             <a:r>
@@ -6865,6 +6860,7 @@
         <a:solidFill>
           <a:srgbClr val="FFFFFF"/>
         </a:solidFill>
+        <a:effectLst/>
       </p:bgPr>
     </p:bg>
     <p:spTree>
@@ -6902,11 +6898,11 @@
           <a:bodyPr wrap="square" lIns="0" tIns="0" rIns="0" bIns="0" rtlCol="0" anchor="ctr"/>
           <a:lstStyle/>
           <a:p>
-            <a:pPr indent="0" marL="0">
-              <a:buNone/>
-            </a:pPr>
-            <a:r>
-              <a:rPr lang="en-US" sz="1100" b="1" spc="200" kern="0" dirty="0">
+            <a:pPr marL="0" indent="0">
+              <a:buNone/>
+            </a:pPr>
+            <a:r>
+              <a:rPr lang="en-US" sz="1100" b="1" kern="0" spc="200" dirty="0">
                 <a:solidFill>
                   <a:srgbClr val="6B46C1"/>
                 </a:solidFill>
@@ -6941,7 +6937,7 @@
           <a:bodyPr wrap="square" lIns="0" tIns="0" rIns="0" bIns="0" rtlCol="0" anchor="ctr"/>
           <a:lstStyle/>
           <a:p>
-            <a:pPr indent="0" marL="0">
+            <a:pPr marL="0" indent="0">
               <a:buNone/>
             </a:pPr>
             <a:r>
@@ -6985,13 +6981,20 @@
             <a:prstDash val="solid"/>
           </a:ln>
           <a:effectLst>
-            <a:outerShdw sx="100000" sy="100000" kx="0" ky="0" algn="bl" rotWithShape="0" blurRad="101600" dist="25400" dir="5400000">
+            <a:outerShdw blurRad="101600" dist="25400" dir="5400000" algn="bl" rotWithShape="0">
               <a:srgbClr val="B9B2CE">
                 <a:alpha val="35000"/>
               </a:srgbClr>
             </a:outerShdw>
           </a:effectLst>
         </p:spPr>
+        <p:txBody>
+          <a:bodyPr/>
+          <a:lstStyle/>
+          <a:p>
+            <a:endParaRPr lang="en-IN"/>
+          </a:p>
+        </p:txBody>
       </p:sp>
       <p:sp>
         <p:nvSpPr>
@@ -7014,7 +7017,7 @@
           <a:bodyPr wrap="square" lIns="0" tIns="0" rIns="0" bIns="0" rtlCol="0" anchor="ctr"/>
           <a:lstStyle/>
           <a:p>
-            <a:pPr indent="0" marL="0">
+            <a:pPr marL="0" indent="0">
               <a:buNone/>
             </a:pPr>
             <a:r>
@@ -7026,7 +7029,7 @@
                 <a:ea typeface="Calibri" pitchFamily="34" charset="-122"/>
                 <a:cs typeface="Calibri" pitchFamily="34" charset="-120"/>
               </a:rPr>
-              <a:t>What an agent does today</a:t>
+              <a:t>What a human does today</a:t>
             </a:r>
             <a:endParaRPr lang="en-US" sz="1600" dirty="0"/>
           </a:p>
@@ -7195,7 +7198,7 @@
           <a:bodyPr wrap="square" lIns="0" tIns="0" rIns="0" bIns="0" rtlCol="0" anchor="ctr"/>
           <a:lstStyle/>
           <a:p>
-            <a:pPr indent="0" marL="0">
+            <a:pPr marL="0" indent="0">
               <a:buNone/>
             </a:pPr>
             <a:r>
@@ -7232,6 +7235,13 @@
           </a:solidFill>
           <a:ln/>
         </p:spPr>
+        <p:txBody>
+          <a:bodyPr/>
+          <a:lstStyle/>
+          <a:p>
+            <a:endParaRPr lang="en-IN"/>
+          </a:p>
+        </p:txBody>
       </p:sp>
       <p:sp>
         <p:nvSpPr>
@@ -7254,7 +7264,7 @@
           <a:bodyPr wrap="square" lIns="0" tIns="0" rIns="0" bIns="0" rtlCol="0" anchor="ctr"/>
           <a:lstStyle/>
           <a:p>
-            <a:pPr algn="ctr" indent="0" marL="0">
+            <a:pPr marL="0" indent="0" algn="ctr">
               <a:buNone/>
             </a:pPr>
             <a:r>
@@ -7293,7 +7303,7 @@
           <a:bodyPr wrap="square" lIns="0" tIns="0" rIns="0" bIns="0" rtlCol="0" anchor="ctr"/>
           <a:lstStyle/>
           <a:p>
-            <a:pPr indent="0" marL="0">
+            <a:pPr marL="0" indent="0">
               <a:buNone/>
             </a:pPr>
             <a:r>
@@ -7332,7 +7342,7 @@
           <a:bodyPr wrap="square" lIns="0" tIns="0" rIns="0" bIns="0" rtlCol="0" anchor="t"/>
           <a:lstStyle/>
           <a:p>
-            <a:pPr indent="0" marL="0">
+            <a:pPr marL="0" indent="0">
               <a:lnSpc>
                 <a:spcPts val="1700"/>
               </a:lnSpc>
@@ -7372,6 +7382,13 @@
           </a:solidFill>
           <a:ln/>
         </p:spPr>
+        <p:txBody>
+          <a:bodyPr/>
+          <a:lstStyle/>
+          <a:p>
+            <a:endParaRPr lang="en-IN"/>
+          </a:p>
+        </p:txBody>
       </p:sp>
       <p:sp>
         <p:nvSpPr>
@@ -7394,7 +7411,7 @@
           <a:bodyPr wrap="square" lIns="0" tIns="0" rIns="0" bIns="0" rtlCol="0" anchor="ctr"/>
           <a:lstStyle/>
           <a:p>
-            <a:pPr algn="ctr" indent="0" marL="0">
+            <a:pPr marL="0" indent="0" algn="ctr">
               <a:buNone/>
             </a:pPr>
             <a:r>
@@ -7433,7 +7450,7 @@
           <a:bodyPr wrap="square" lIns="0" tIns="0" rIns="0" bIns="0" rtlCol="0" anchor="ctr"/>
           <a:lstStyle/>
           <a:p>
-            <a:pPr indent="0" marL="0">
+            <a:pPr marL="0" indent="0">
               <a:buNone/>
             </a:pPr>
             <a:r>
@@ -7472,7 +7489,7 @@
           <a:bodyPr wrap="square" lIns="0" tIns="0" rIns="0" bIns="0" rtlCol="0" anchor="t"/>
           <a:lstStyle/>
           <a:p>
-            <a:pPr indent="0" marL="0">
+            <a:pPr marL="0" indent="0">
               <a:lnSpc>
                 <a:spcPts val="1700"/>
               </a:lnSpc>
@@ -7487,7 +7504,7 @@
                 <a:ea typeface="Calibri" pitchFamily="34" charset="-122"/>
                 <a:cs typeface="Calibri" pitchFamily="34" charset="-120"/>
               </a:rPr>
-              <a:t>Two agents categorise and escalate the same case differently.</a:t>
+              <a:t>Two humans categorise and escalate the same case differently.</a:t>
             </a:r>
             <a:endParaRPr lang="en-US" sz="1300" dirty="0"/>
           </a:p>
@@ -7512,6 +7529,13 @@
           </a:solidFill>
           <a:ln/>
         </p:spPr>
+        <p:txBody>
+          <a:bodyPr/>
+          <a:lstStyle/>
+          <a:p>
+            <a:endParaRPr lang="en-IN"/>
+          </a:p>
+        </p:txBody>
       </p:sp>
       <p:sp>
         <p:nvSpPr>
@@ -7534,7 +7558,7 @@
           <a:bodyPr wrap="square" lIns="0" tIns="0" rIns="0" bIns="0" rtlCol="0" anchor="ctr"/>
           <a:lstStyle/>
           <a:p>
-            <a:pPr algn="ctr" indent="0" marL="0">
+            <a:pPr marL="0" indent="0" algn="ctr">
               <a:buNone/>
             </a:pPr>
             <a:r>
@@ -7573,7 +7597,7 @@
           <a:bodyPr wrap="square" lIns="0" tIns="0" rIns="0" bIns="0" rtlCol="0" anchor="ctr"/>
           <a:lstStyle/>
           <a:p>
-            <a:pPr indent="0" marL="0">
+            <a:pPr marL="0" indent="0">
               <a:buNone/>
             </a:pPr>
             <a:r>
@@ -7612,7 +7636,7 @@
           <a:bodyPr wrap="square" lIns="0" tIns="0" rIns="0" bIns="0" rtlCol="0" anchor="t"/>
           <a:lstStyle/>
           <a:p>
-            <a:pPr indent="0" marL="0">
+            <a:pPr marL="0" indent="0">
               <a:lnSpc>
                 <a:spcPts val="1700"/>
               </a:lnSpc>
@@ -7649,6 +7673,7 @@
         <a:solidFill>
           <a:srgbClr val="FFFFFF"/>
         </a:solidFill>
+        <a:effectLst/>
       </p:bgPr>
     </p:bg>
     <p:spTree>
@@ -7686,11 +7711,11 @@
           <a:bodyPr wrap="square" lIns="0" tIns="0" rIns="0" bIns="0" rtlCol="0" anchor="ctr"/>
           <a:lstStyle/>
           <a:p>
-            <a:pPr indent="0" marL="0">
-              <a:buNone/>
-            </a:pPr>
-            <a:r>
-              <a:rPr lang="en-US" sz="1100" b="1" spc="200" kern="0" dirty="0">
+            <a:pPr marL="0" indent="0">
+              <a:buNone/>
+            </a:pPr>
+            <a:r>
+              <a:rPr lang="en-US" sz="1100" b="1" kern="0" spc="200" dirty="0">
                 <a:solidFill>
                   <a:srgbClr val="6B46C1"/>
                 </a:solidFill>
@@ -7725,7 +7750,7 @@
           <a:bodyPr wrap="square" lIns="0" tIns="0" rIns="0" bIns="0" rtlCol="0" anchor="ctr"/>
           <a:lstStyle/>
           <a:p>
-            <a:pPr indent="0" marL="0">
+            <a:pPr marL="0" indent="0">
               <a:buNone/>
             </a:pPr>
             <a:r>
@@ -7752,7 +7777,7 @@
         <p:spPr>
           <a:xfrm>
             <a:off x="640080" y="1463040"/>
-            <a:ext cx="2926080" cy="384048"/>
+            <a:ext cx="4565904" cy="384048"/>
           </a:xfrm>
           <a:prstGeom prst="rect">
             <a:avLst/>
@@ -7766,11 +7791,9 @@
           <a:bodyPr wrap="square" lIns="76200" tIns="76200" rIns="76200" bIns="76200" rtlCol="0" anchor="ctr"/>
           <a:lstStyle/>
           <a:p>
-            <a:pPr algn="ctr" indent="0" marL="0">
-              <a:buNone/>
-            </a:pPr>
-            <a:r>
-              <a:rPr lang="en-US" sz="1600" b="1" dirty="0">
+            <a:pPr algn="ctr"/>
+            <a:r>
+              <a:rPr lang="en-IN" sz="1600" b="1" dirty="0">
                 <a:solidFill>
                   <a:srgbClr val="FFFFFF"/>
                 </a:solidFill>
@@ -7778,6 +7801,17 @@
                 <a:ea typeface="Courier New" pitchFamily="34" charset="-122"/>
                 <a:cs typeface="Courier New" pitchFamily="34" charset="-120"/>
               </a:rPr>
+              <a:t>Batch : </a:t>
+            </a:r>
+            <a:r>
+              <a:rPr lang="en-US" sz="1600" b="1" dirty="0">
+                <a:solidFill>
+                  <a:srgbClr val="FFFFFF"/>
+                </a:solidFill>
+                <a:latin typeface="Courier New" pitchFamily="34" charset="0"/>
+                <a:ea typeface="Courier New" pitchFamily="34" charset="-122"/>
+                <a:cs typeface="Courier New" pitchFamily="34" charset="-120"/>
+              </a:rPr>
               <a:t>python app.py</a:t>
             </a:r>
             <a:endParaRPr lang="en-US" sz="1600" dirty="0"/>
@@ -7792,20 +7826,20 @@
         </p:nvSpPr>
         <p:spPr>
           <a:xfrm>
-            <a:off x="3749040" y="1481328"/>
-            <a:ext cx="7772400" cy="365760"/>
-          </a:xfrm>
-          <a:prstGeom prst="rect">
-            <a:avLst/>
-          </a:prstGeom>
-          <a:noFill/>
-          <a:ln/>
-        </p:spPr>
-        <p:txBody>
-          <a:bodyPr wrap="square" lIns="0" tIns="0" rIns="0" bIns="0" rtlCol="0" anchor="ctr"/>
-          <a:lstStyle/>
-          <a:p>
-            <a:pPr indent="0" marL="0">
+            <a:off x="5358384" y="1481328"/>
+            <a:ext cx="6163056" cy="365760"/>
+          </a:xfrm>
+          <a:prstGeom prst="rect">
+            <a:avLst/>
+          </a:prstGeom>
+          <a:noFill/>
+          <a:ln/>
+        </p:spPr>
+        <p:txBody>
+          <a:bodyPr wrap="square" lIns="0" tIns="0" rIns="0" bIns="0" rtlCol="0" anchor="ctr"/>
+          <a:lstStyle/>
+          <a:p>
+            <a:pPr marL="0" indent="0">
               <a:buNone/>
             </a:pPr>
             <a:r>
@@ -7831,7 +7865,7 @@
         </p:nvSpPr>
         <p:spPr>
           <a:xfrm>
-            <a:off x="640080" y="2148840"/>
+            <a:off x="640080" y="2359152"/>
             <a:ext cx="3502152" cy="3017520"/>
           </a:xfrm>
           <a:prstGeom prst="roundRect">
@@ -7849,13 +7883,20 @@
             <a:prstDash val="solid"/>
           </a:ln>
           <a:effectLst>
-            <a:outerShdw sx="100000" sy="100000" kx="0" ky="0" algn="bl" rotWithShape="0" blurRad="101600" dist="25400" dir="5400000">
+            <a:outerShdw blurRad="101600" dist="25400" dir="5400000" algn="bl" rotWithShape="0">
               <a:srgbClr val="B9B2CE">
                 <a:alpha val="35000"/>
               </a:srgbClr>
             </a:outerShdw>
           </a:effectLst>
         </p:spPr>
+        <p:txBody>
+          <a:bodyPr/>
+          <a:lstStyle/>
+          <a:p>
+            <a:endParaRPr lang="en-IN"/>
+          </a:p>
+        </p:txBody>
       </p:sp>
       <p:sp>
         <p:nvSpPr>
@@ -7865,7 +7906,7 @@
         </p:nvSpPr>
         <p:spPr>
           <a:xfrm>
-            <a:off x="932688" y="2395728"/>
+            <a:off x="932688" y="2590801"/>
             <a:ext cx="420624" cy="420624"/>
           </a:xfrm>
           <a:prstGeom prst="ellipse">
@@ -7876,6 +7917,13 @@
           </a:solidFill>
           <a:ln/>
         </p:spPr>
+        <p:txBody>
+          <a:bodyPr/>
+          <a:lstStyle/>
+          <a:p>
+            <a:endParaRPr lang="en-IN"/>
+          </a:p>
+        </p:txBody>
       </p:sp>
       <p:sp>
         <p:nvSpPr>
@@ -7885,7 +7933,7 @@
         </p:nvSpPr>
         <p:spPr>
           <a:xfrm>
-            <a:off x="932688" y="2395728"/>
+            <a:off x="932688" y="2578608"/>
             <a:ext cx="420624" cy="420624"/>
           </a:xfrm>
           <a:prstGeom prst="rect">
@@ -7898,7 +7946,7 @@
           <a:bodyPr wrap="square" lIns="0" tIns="0" rIns="0" bIns="0" rtlCol="0" anchor="ctr"/>
           <a:lstStyle/>
           <a:p>
-            <a:pPr algn="ctr" indent="0" marL="0">
+            <a:pPr marL="0" indent="0" algn="ctr">
               <a:buNone/>
             </a:pPr>
             <a:r>
@@ -7924,7 +7972,7 @@
         </p:nvSpPr>
         <p:spPr>
           <a:xfrm>
-            <a:off x="932688" y="2944368"/>
+            <a:off x="932688" y="3154680"/>
             <a:ext cx="2926080" cy="566928"/>
           </a:xfrm>
           <a:prstGeom prst="rect">
@@ -7937,7 +7985,7 @@
           <a:bodyPr wrap="square" lIns="0" tIns="0" rIns="0" bIns="0" rtlCol="0" anchor="ctr"/>
           <a:lstStyle/>
           <a:p>
-            <a:pPr indent="0" marL="0">
+            <a:pPr marL="0" indent="0">
               <a:buNone/>
             </a:pPr>
             <a:r>
@@ -7963,7 +8011,7 @@
         </p:nvSpPr>
         <p:spPr>
           <a:xfrm>
-            <a:off x="932688" y="3520440"/>
+            <a:off x="932688" y="3730752"/>
             <a:ext cx="2926080" cy="1371600"/>
           </a:xfrm>
           <a:prstGeom prst="rect">
@@ -7976,7 +8024,7 @@
           <a:bodyPr wrap="square" lIns="0" tIns="0" rIns="0" bIns="0" rtlCol="0" anchor="t"/>
           <a:lstStyle/>
           <a:p>
-            <a:pPr indent="0" marL="0">
+            <a:pPr marL="0" indent="0">
               <a:lnSpc>
                 <a:spcPts val="1700"/>
               </a:lnSpc>
@@ -8005,7 +8053,7 @@
         </p:nvSpPr>
         <p:spPr>
           <a:xfrm>
-            <a:off x="932688" y="4754880"/>
+            <a:off x="932688" y="4965192"/>
             <a:ext cx="2926080" cy="274320"/>
           </a:xfrm>
           <a:prstGeom prst="rect">
@@ -8018,7 +8066,7 @@
           <a:bodyPr wrap="square" lIns="0" tIns="0" rIns="0" bIns="0" rtlCol="0" anchor="ctr"/>
           <a:lstStyle/>
           <a:p>
-            <a:pPr indent="0" marL="0">
+            <a:pPr marL="0" indent="0">
               <a:buNone/>
             </a:pPr>
             <a:r>
@@ -8044,7 +8092,7 @@
         </p:nvSpPr>
         <p:spPr>
           <a:xfrm>
-            <a:off x="4416552" y="2148840"/>
+            <a:off x="4416552" y="2359152"/>
             <a:ext cx="3502152" cy="3017520"/>
           </a:xfrm>
           <a:prstGeom prst="roundRect">
@@ -8062,13 +8110,20 @@
             <a:prstDash val="solid"/>
           </a:ln>
           <a:effectLst>
-            <a:outerShdw sx="100000" sy="100000" kx="0" ky="0" algn="bl" rotWithShape="0" blurRad="101600" dist="25400" dir="5400000">
+            <a:outerShdw blurRad="101600" dist="25400" dir="5400000" algn="bl" rotWithShape="0">
               <a:srgbClr val="B9B2CE">
                 <a:alpha val="35000"/>
               </a:srgbClr>
             </a:outerShdw>
           </a:effectLst>
         </p:spPr>
+        <p:txBody>
+          <a:bodyPr/>
+          <a:lstStyle/>
+          <a:p>
+            <a:endParaRPr lang="en-IN"/>
+          </a:p>
+        </p:txBody>
       </p:sp>
       <p:sp>
         <p:nvSpPr>
@@ -8078,7 +8133,7 @@
         </p:nvSpPr>
         <p:spPr>
           <a:xfrm>
-            <a:off x="4709160" y="2395728"/>
+            <a:off x="4709160" y="2569464"/>
             <a:ext cx="420624" cy="420624"/>
           </a:xfrm>
           <a:prstGeom prst="ellipse">
@@ -8089,6 +8144,13 @@
           </a:solidFill>
           <a:ln/>
         </p:spPr>
+        <p:txBody>
+          <a:bodyPr/>
+          <a:lstStyle/>
+          <a:p>
+            <a:endParaRPr lang="en-IN"/>
+          </a:p>
+        </p:txBody>
       </p:sp>
       <p:sp>
         <p:nvSpPr>
@@ -8098,7 +8160,7 @@
         </p:nvSpPr>
         <p:spPr>
           <a:xfrm>
-            <a:off x="4709160" y="2395728"/>
+            <a:off x="4709160" y="2560320"/>
             <a:ext cx="420624" cy="420624"/>
           </a:xfrm>
           <a:prstGeom prst="rect">
@@ -8111,7 +8173,7 @@
           <a:bodyPr wrap="square" lIns="0" tIns="0" rIns="0" bIns="0" rtlCol="0" anchor="ctr"/>
           <a:lstStyle/>
           <a:p>
-            <a:pPr algn="ctr" indent="0" marL="0">
+            <a:pPr marL="0" indent="0" algn="ctr">
               <a:buNone/>
             </a:pPr>
             <a:r>
@@ -8137,7 +8199,7 @@
         </p:nvSpPr>
         <p:spPr>
           <a:xfrm>
-            <a:off x="4709160" y="2944368"/>
+            <a:off x="4709160" y="3154680"/>
             <a:ext cx="2926080" cy="566928"/>
           </a:xfrm>
           <a:prstGeom prst="rect">
@@ -8150,7 +8212,7 @@
           <a:bodyPr wrap="square" lIns="0" tIns="0" rIns="0" bIns="0" rtlCol="0" anchor="ctr"/>
           <a:lstStyle/>
           <a:p>
-            <a:pPr indent="0" marL="0">
+            <a:pPr marL="0" indent="0">
               <a:buNone/>
             </a:pPr>
             <a:r>
@@ -8176,7 +8238,7 @@
         </p:nvSpPr>
         <p:spPr>
           <a:xfrm>
-            <a:off x="4709160" y="3520440"/>
+            <a:off x="4709160" y="3730752"/>
             <a:ext cx="2926080" cy="1371600"/>
           </a:xfrm>
           <a:prstGeom prst="rect">
@@ -8189,7 +8251,7 @@
           <a:bodyPr wrap="square" lIns="0" tIns="0" rIns="0" bIns="0" rtlCol="0" anchor="t"/>
           <a:lstStyle/>
           <a:p>
-            <a:pPr indent="0" marL="0">
+            <a:pPr marL="0" indent="0">
               <a:lnSpc>
                 <a:spcPts val="1700"/>
               </a:lnSpc>
@@ -8218,7 +8280,7 @@
         </p:nvSpPr>
         <p:spPr>
           <a:xfrm>
-            <a:off x="4709160" y="4754880"/>
+            <a:off x="4709160" y="4965192"/>
             <a:ext cx="2926080" cy="274320"/>
           </a:xfrm>
           <a:prstGeom prst="rect">
@@ -8231,7 +8293,7 @@
           <a:bodyPr wrap="square" lIns="0" tIns="0" rIns="0" bIns="0" rtlCol="0" anchor="ctr"/>
           <a:lstStyle/>
           <a:p>
-            <a:pPr indent="0" marL="0">
+            <a:pPr marL="0" indent="0">
               <a:buNone/>
             </a:pPr>
             <a:r>
@@ -8257,7 +8319,7 @@
         </p:nvSpPr>
         <p:spPr>
           <a:xfrm>
-            <a:off x="8193024" y="2148840"/>
+            <a:off x="8193024" y="2359152"/>
             <a:ext cx="3502152" cy="3017520"/>
           </a:xfrm>
           <a:prstGeom prst="roundRect">
@@ -8275,13 +8337,20 @@
             <a:prstDash val="solid"/>
           </a:ln>
           <a:effectLst>
-            <a:outerShdw sx="100000" sy="100000" kx="0" ky="0" algn="bl" rotWithShape="0" blurRad="101600" dist="25400" dir="5400000">
+            <a:outerShdw blurRad="101600" dist="25400" dir="5400000" algn="bl" rotWithShape="0">
               <a:srgbClr val="B9B2CE">
                 <a:alpha val="35000"/>
               </a:srgbClr>
             </a:outerShdw>
           </a:effectLst>
         </p:spPr>
+        <p:txBody>
+          <a:bodyPr/>
+          <a:lstStyle/>
+          <a:p>
+            <a:endParaRPr lang="en-IN"/>
+          </a:p>
+        </p:txBody>
       </p:sp>
       <p:sp>
         <p:nvSpPr>
@@ -8291,7 +8360,7 @@
         </p:nvSpPr>
         <p:spPr>
           <a:xfrm>
-            <a:off x="8485632" y="2395728"/>
+            <a:off x="8485632" y="2578608"/>
             <a:ext cx="420624" cy="420624"/>
           </a:xfrm>
           <a:prstGeom prst="ellipse">
@@ -8302,6 +8371,13 @@
           </a:solidFill>
           <a:ln/>
         </p:spPr>
+        <p:txBody>
+          <a:bodyPr/>
+          <a:lstStyle/>
+          <a:p>
+            <a:endParaRPr lang="en-IN"/>
+          </a:p>
+        </p:txBody>
       </p:sp>
       <p:sp>
         <p:nvSpPr>
@@ -8311,7 +8387,7 @@
         </p:nvSpPr>
         <p:spPr>
           <a:xfrm>
-            <a:off x="8485632" y="2395728"/>
+            <a:off x="8485632" y="2606040"/>
             <a:ext cx="420624" cy="420624"/>
           </a:xfrm>
           <a:prstGeom prst="rect">
@@ -8324,7 +8400,7 @@
           <a:bodyPr wrap="square" lIns="0" tIns="0" rIns="0" bIns="0" rtlCol="0" anchor="ctr"/>
           <a:lstStyle/>
           <a:p>
-            <a:pPr algn="ctr" indent="0" marL="0">
+            <a:pPr marL="0" indent="0" algn="ctr">
               <a:buNone/>
             </a:pPr>
             <a:r>
@@ -8350,7 +8426,7 @@
         </p:nvSpPr>
         <p:spPr>
           <a:xfrm>
-            <a:off x="8485632" y="2944368"/>
+            <a:off x="8485632" y="3154680"/>
             <a:ext cx="2926080" cy="566928"/>
           </a:xfrm>
           <a:prstGeom prst="rect">
@@ -8363,7 +8439,7 @@
           <a:bodyPr wrap="square" lIns="0" tIns="0" rIns="0" bIns="0" rtlCol="0" anchor="ctr"/>
           <a:lstStyle/>
           <a:p>
-            <a:pPr indent="0" marL="0">
+            <a:pPr marL="0" indent="0">
               <a:buNone/>
             </a:pPr>
             <a:r>
@@ -8389,7 +8465,7 @@
         </p:nvSpPr>
         <p:spPr>
           <a:xfrm>
-            <a:off x="8485632" y="3520440"/>
+            <a:off x="8485632" y="3730752"/>
             <a:ext cx="2926080" cy="1371600"/>
           </a:xfrm>
           <a:prstGeom prst="rect">
@@ -8402,7 +8478,7 @@
           <a:bodyPr wrap="square" lIns="0" tIns="0" rIns="0" bIns="0" rtlCol="0" anchor="t"/>
           <a:lstStyle/>
           <a:p>
-            <a:pPr indent="0" marL="0">
+            <a:pPr marL="0" indent="0">
               <a:lnSpc>
                 <a:spcPts val="1700"/>
               </a:lnSpc>
@@ -8431,7 +8507,7 @@
         </p:nvSpPr>
         <p:spPr>
           <a:xfrm>
-            <a:off x="8485632" y="4754880"/>
+            <a:off x="8485632" y="4965192"/>
             <a:ext cx="2926080" cy="274320"/>
           </a:xfrm>
           <a:prstGeom prst="rect">
@@ -8444,7 +8520,7 @@
           <a:bodyPr wrap="square" lIns="0" tIns="0" rIns="0" bIns="0" rtlCol="0" anchor="ctr"/>
           <a:lstStyle/>
           <a:p>
-            <a:pPr indent="0" marL="0">
+            <a:pPr marL="0" indent="0">
               <a:buNone/>
             </a:pPr>
             <a:r>
@@ -8470,7 +8546,7 @@
         </p:nvSpPr>
         <p:spPr>
           <a:xfrm>
-            <a:off x="640080" y="5440680"/>
+            <a:off x="640080" y="5650992"/>
             <a:ext cx="10881360" cy="365760"/>
           </a:xfrm>
           <a:prstGeom prst="rect">
@@ -8483,7 +8559,7 @@
           <a:bodyPr wrap="square" lIns="0" tIns="0" rIns="0" bIns="0" rtlCol="0" anchor="ctr"/>
           <a:lstStyle/>
           <a:p>
-            <a:pPr indent="0" marL="0">
+            <a:pPr marL="0" indent="0">
               <a:buNone/>
             </a:pPr>
             <a:r>
@@ -8498,6 +8574,121 @@
               <a:t>Plus one consolidated final_report.csv across the whole batch, and a timestamped run.log</a:t>
             </a:r>
             <a:endParaRPr lang="en-US" sz="1400" dirty="0"/>
+          </a:p>
+        </p:txBody>
+      </p:sp>
+      <p:sp>
+        <p:nvSpPr>
+          <p:cNvPr id="26" name="Text 2">
+            <a:extLst>
+              <a:ext uri="{FF2B5EF4-FFF2-40B4-BE49-F238E27FC236}">
+                <a16:creationId xmlns:a16="http://schemas.microsoft.com/office/drawing/2014/main" id="{12621F88-2502-5AD6-362E-2737E5892E48}"/>
+              </a:ext>
+            </a:extLst>
+          </p:cNvPr>
+          <p:cNvSpPr txBox="1"/>
+          <p:nvPr/>
+        </p:nvSpPr>
+        <p:spPr>
+          <a:xfrm>
+            <a:off x="646176" y="1880616"/>
+            <a:ext cx="4565904" cy="384049"/>
+          </a:xfrm>
+          <a:prstGeom prst="rect">
+            <a:avLst/>
+          </a:prstGeom>
+          <a:solidFill>
+            <a:srgbClr val="2A1B4D"/>
+          </a:solidFill>
+          <a:ln/>
+        </p:spPr>
+        <p:txBody>
+          <a:bodyPr wrap="square" lIns="76200" tIns="76200" rIns="76200" bIns="76200" rtlCol="0" anchor="ctr"/>
+          <a:lstStyle/>
+          <a:p>
+            <a:r>
+              <a:rPr lang="en-US" sz="1600" b="1" dirty="0">
+                <a:solidFill>
+                  <a:srgbClr val="FFFFFF"/>
+                </a:solidFill>
+                <a:latin typeface="Courier New" pitchFamily="34" charset="0"/>
+                <a:ea typeface="Courier New" pitchFamily="34" charset="-122"/>
+                <a:cs typeface="Courier New" pitchFamily="34" charset="-120"/>
+              </a:rPr>
+              <a:t>Web : </a:t>
+            </a:r>
+            <a:r>
+              <a:rPr lang="en-US" sz="1600" b="1" dirty="0" err="1">
+                <a:solidFill>
+                  <a:srgbClr val="FFFFFF"/>
+                </a:solidFill>
+                <a:latin typeface="Courier New" pitchFamily="34" charset="0"/>
+                <a:ea typeface="Courier New" pitchFamily="34" charset="-122"/>
+                <a:cs typeface="Courier New" pitchFamily="34" charset="-120"/>
+              </a:rPr>
+              <a:t>streamlit</a:t>
+            </a:r>
+            <a:r>
+              <a:rPr lang="en-US" sz="1600" b="1" dirty="0">
+                <a:solidFill>
+                  <a:srgbClr val="FFFFFF"/>
+                </a:solidFill>
+                <a:latin typeface="Courier New" pitchFamily="34" charset="0"/>
+                <a:ea typeface="Courier New" pitchFamily="34" charset="-122"/>
+                <a:cs typeface="Courier New" pitchFamily="34" charset="-120"/>
+              </a:rPr>
+              <a:t> run streamlit_app.py</a:t>
+            </a:r>
+            <a:endParaRPr lang="en-US" sz="1600" dirty="0"/>
+          </a:p>
+        </p:txBody>
+      </p:sp>
+      <p:sp>
+        <p:nvSpPr>
+          <p:cNvPr id="28" name="Text 3">
+            <a:extLst>
+              <a:ext uri="{FF2B5EF4-FFF2-40B4-BE49-F238E27FC236}">
+                <a16:creationId xmlns:a16="http://schemas.microsoft.com/office/drawing/2014/main" id="{9F305596-D8B6-BDC5-089F-F68A7B18BE8E}"/>
+              </a:ext>
+            </a:extLst>
+          </p:cNvPr>
+          <p:cNvSpPr txBox="1"/>
+          <p:nvPr/>
+        </p:nvSpPr>
+        <p:spPr>
+          <a:xfrm>
+            <a:off x="5358384" y="1842516"/>
+            <a:ext cx="6163056" cy="365760"/>
+          </a:xfrm>
+          <a:prstGeom prst="rect">
+            <a:avLst/>
+          </a:prstGeom>
+          <a:noFill/>
+          <a:ln/>
+        </p:spPr>
+        <p:txBody>
+          <a:bodyPr wrap="square" lIns="0" tIns="0" rIns="0" bIns="0" rtlCol="0" anchor="ctr"/>
+          <a:lstStyle/>
+          <a:p>
+            <a:r>
+              <a:rPr lang="en-IN" sz="1400" i="1" dirty="0">
+                <a:solidFill>
+                  <a:srgbClr val="5B5670"/>
+                </a:solidFill>
+                <a:latin typeface="Calibri" pitchFamily="34" charset="0"/>
+                <a:ea typeface="Calibri" pitchFamily="34" charset="-122"/>
+                <a:cs typeface="Calibri" pitchFamily="34" charset="-120"/>
+              </a:rPr>
+              <a:t>The same pipeline in a browser — this is what gets deployed</a:t>
+            </a:r>
+            <a:endParaRPr lang="en-US" sz="1400" i="1" dirty="0">
+              <a:solidFill>
+                <a:srgbClr val="5B5670"/>
+              </a:solidFill>
+              <a:latin typeface="Calibri" pitchFamily="34" charset="0"/>
+              <a:ea typeface="Calibri" pitchFamily="34" charset="-122"/>
+              <a:cs typeface="Calibri" pitchFamily="34" charset="-120"/>
+            </a:endParaRPr>
           </a:p>
         </p:txBody>
       </p:sp>
@@ -8517,6 +8708,7 @@
         <a:solidFill>
           <a:srgbClr val="FFFFFF"/>
         </a:solidFill>
+        <a:effectLst/>
       </p:bgPr>
     </p:bg>
     <p:spTree>
@@ -8554,11 +8746,11 @@
           <a:bodyPr wrap="square" lIns="0" tIns="0" rIns="0" bIns="0" rtlCol="0" anchor="ctr"/>
           <a:lstStyle/>
           <a:p>
-            <a:pPr indent="0" marL="0">
-              <a:buNone/>
-            </a:pPr>
-            <a:r>
-              <a:rPr lang="en-US" sz="1100" b="1" spc="200" kern="0" dirty="0">
+            <a:pPr marL="0" indent="0">
+              <a:buNone/>
+            </a:pPr>
+            <a:r>
+              <a:rPr lang="en-US" sz="1100" b="1" kern="0" spc="200" dirty="0">
                 <a:solidFill>
                   <a:srgbClr val="6B46C1"/>
                 </a:solidFill>
@@ -8569,66 +8761,33 @@
               <a:t>ARCHITECTURE</a:t>
             </a:r>
             <a:endParaRPr lang="en-US" sz="1100" dirty="0"/>
-          </a:p>
-        </p:txBody>
-      </p:sp>
-      <p:sp>
-        <p:nvSpPr>
-          <p:cNvPr id="3" name="Text 1"/>
-          <p:cNvSpPr txBox="1"/>
-          <p:nvPr/>
-        </p:nvSpPr>
-        <p:spPr>
-          <a:xfrm>
-            <a:off x="640080" y="658368"/>
-            <a:ext cx="10881360" cy="685800"/>
-          </a:xfrm>
-          <a:prstGeom prst="rect">
-            <a:avLst/>
-          </a:prstGeom>
-          <a:noFill/>
-          <a:ln/>
-        </p:spPr>
-        <p:txBody>
-          <a:bodyPr wrap="square" lIns="0" tIns="0" rIns="0" bIns="0" rtlCol="0" anchor="ctr"/>
-          <a:lstStyle/>
-          <a:p>
-            <a:pPr indent="0" marL="0">
-              <a:buNone/>
-            </a:pPr>
-            <a:r>
-              <a:rPr lang="en-US" sz="3200" b="1" dirty="0">
-                <a:solidFill>
-                  <a:srgbClr val="2A1B4D"/>
-                </a:solidFill>
-                <a:latin typeface="Cambria" pitchFamily="34" charset="0"/>
-                <a:ea typeface="Cambria" pitchFamily="34" charset="-122"/>
-                <a:cs typeface="Cambria" pitchFamily="34" charset="-120"/>
-              </a:rPr>
-              <a:t>Six modules, one direction of dependency</a:t>
-            </a:r>
-            <a:endParaRPr lang="en-US" sz="3200" dirty="0"/>
           </a:p>
         </p:txBody>
       </p:sp>
       <p:pic>
         <p:nvPicPr>
-          <p:cNvPr id="4" name="Image 0" descr="preencoded.png">    </p:cNvPr>
+          <p:cNvPr id="8" name="Picture 7">
+            <a:extLst>
+              <a:ext uri="{FF2B5EF4-FFF2-40B4-BE49-F238E27FC236}">
+                <a16:creationId xmlns:a16="http://schemas.microsoft.com/office/drawing/2014/main" id="{CDDA1A6E-6733-3DE1-A3EA-F900CE72144C}"/>
+              </a:ext>
+            </a:extLst>
+          </p:cNvPr>
           <p:cNvPicPr>
             <a:picLocks noChangeAspect="1"/>
           </p:cNvPicPr>
           <p:nvPr/>
         </p:nvPicPr>
         <p:blipFill>
-          <a:blip r:embed="rId1"/>
+          <a:blip r:embed="rId3"/>
           <a:stretch>
             <a:fillRect/>
           </a:stretch>
         </p:blipFill>
         <p:spPr>
           <a:xfrm>
-            <a:off x="658368" y="1371600"/>
-            <a:ext cx="10881360" cy="4873752"/>
+            <a:off x="0" y="640080"/>
+            <a:ext cx="12192000" cy="6217920"/>
           </a:xfrm>
           <a:prstGeom prst="rect">
             <a:avLst/>
@@ -8651,6 +8810,7 @@
         <a:solidFill>
           <a:srgbClr val="FFFFFF"/>
         </a:solidFill>
+        <a:effectLst/>
       </p:bgPr>
     </p:bg>
     <p:spTree>
@@ -8688,11 +8848,11 @@
           <a:bodyPr wrap="square" lIns="0" tIns="0" rIns="0" bIns="0" rtlCol="0" anchor="ctr"/>
           <a:lstStyle/>
           <a:p>
-            <a:pPr indent="0" marL="0">
-              <a:buNone/>
-            </a:pPr>
-            <a:r>
-              <a:rPr lang="en-US" sz="1100" b="1" spc="200" kern="0" dirty="0">
+            <a:pPr marL="0" indent="0">
+              <a:buNone/>
+            </a:pPr>
+            <a:r>
+              <a:rPr lang="en-US" sz="1100" b="1" kern="0" spc="200" dirty="0">
                 <a:solidFill>
                   <a:srgbClr val="6B46C1"/>
                 </a:solidFill>
@@ -8727,7 +8887,7 @@
           <a:bodyPr wrap="square" lIns="0" tIns="0" rIns="0" bIns="0" rtlCol="0" anchor="ctr"/>
           <a:lstStyle/>
           <a:p>
-            <a:pPr indent="0" marL="0">
+            <a:pPr marL="0" indent="0">
               <a:buNone/>
             </a:pPr>
             <a:r>
@@ -8745,30 +8905,6 @@
           </a:p>
         </p:txBody>
       </p:sp>
-      <p:pic>
-        <p:nvPicPr>
-          <p:cNvPr id="4" name="Image 0" descr="preencoded.png">    </p:cNvPr>
-          <p:cNvPicPr>
-            <a:picLocks noChangeAspect="1"/>
-          </p:cNvPicPr>
-          <p:nvPr/>
-        </p:nvPicPr>
-        <p:blipFill>
-          <a:blip r:embed="rId1"/>
-          <a:stretch>
-            <a:fillRect/>
-          </a:stretch>
-        </p:blipFill>
-        <p:spPr>
-          <a:xfrm>
-            <a:off x="502920" y="1481328"/>
-            <a:ext cx="7498080" cy="4197096"/>
-          </a:xfrm>
-          <a:prstGeom prst="rect">
-            <a:avLst/>
-          </a:prstGeom>
-        </p:spPr>
-      </p:pic>
       <p:sp>
         <p:nvSpPr>
           <p:cNvPr id="5" name="Shape 2"/>
@@ -8795,13 +8931,20 @@
             <a:prstDash val="solid"/>
           </a:ln>
           <a:effectLst>
-            <a:outerShdw sx="100000" sy="100000" kx="0" ky="0" algn="bl" rotWithShape="0" blurRad="101600" dist="25400" dir="5400000">
+            <a:outerShdw blurRad="101600" dist="25400" dir="5400000" algn="bl" rotWithShape="0">
               <a:srgbClr val="B9B2CE">
                 <a:alpha val="35000"/>
               </a:srgbClr>
             </a:outerShdw>
           </a:effectLst>
         </p:spPr>
+        <p:txBody>
+          <a:bodyPr/>
+          <a:lstStyle/>
+          <a:p>
+            <a:endParaRPr lang="en-IN"/>
+          </a:p>
+        </p:txBody>
       </p:sp>
       <p:sp>
         <p:nvSpPr>
@@ -8824,7 +8967,7 @@
           <a:bodyPr wrap="square" lIns="0" tIns="0" rIns="0" bIns="0" rtlCol="0" anchor="ctr"/>
           <a:lstStyle/>
           <a:p>
-            <a:pPr indent="0" marL="0">
+            <a:pPr marL="0" indent="0">
               <a:buNone/>
             </a:pPr>
             <a:r>
@@ -8960,6 +9103,36 @@
           </a:p>
         </p:txBody>
       </p:sp>
+      <p:pic>
+        <p:nvPicPr>
+          <p:cNvPr id="9" name="Picture 8">
+            <a:extLst>
+              <a:ext uri="{FF2B5EF4-FFF2-40B4-BE49-F238E27FC236}">
+                <a16:creationId xmlns:a16="http://schemas.microsoft.com/office/drawing/2014/main" id="{BE8251D7-86FD-DBDC-DD26-50DCF13F632A}"/>
+              </a:ext>
+            </a:extLst>
+          </p:cNvPr>
+          <p:cNvPicPr>
+            <a:picLocks noChangeAspect="1"/>
+          </p:cNvPicPr>
+          <p:nvPr/>
+        </p:nvPicPr>
+        <p:blipFill>
+          <a:blip r:embed="rId3"/>
+          <a:stretch>
+            <a:fillRect/>
+          </a:stretch>
+        </p:blipFill>
+        <p:spPr>
+          <a:xfrm>
+            <a:off x="575679" y="1419613"/>
+            <a:ext cx="7699641" cy="4519071"/>
+          </a:xfrm>
+          <a:prstGeom prst="rect">
+            <a:avLst/>
+          </a:prstGeom>
+        </p:spPr>
+      </p:pic>
     </p:spTree>
   </p:cSld>
   <p:clrMapOvr>
@@ -8976,6 +9149,7 @@
         <a:solidFill>
           <a:srgbClr val="FFFFFF"/>
         </a:solidFill>
+        <a:effectLst/>
       </p:bgPr>
     </p:bg>
     <p:spTree>
@@ -9013,11 +9187,11 @@
           <a:bodyPr wrap="square" lIns="0" tIns="0" rIns="0" bIns="0" rtlCol="0" anchor="ctr"/>
           <a:lstStyle/>
           <a:p>
-            <a:pPr indent="0" marL="0">
-              <a:buNone/>
-            </a:pPr>
-            <a:r>
-              <a:rPr lang="en-US" sz="1100" b="1" spc="200" kern="0" dirty="0">
+            <a:pPr marL="0" indent="0">
+              <a:buNone/>
+            </a:pPr>
+            <a:r>
+              <a:rPr lang="en-US" sz="1100" b="1" kern="0" spc="200" dirty="0">
                 <a:solidFill>
                   <a:srgbClr val="6B46C1"/>
                 </a:solidFill>
@@ -9052,7 +9226,7 @@
           <a:bodyPr wrap="square" lIns="0" tIns="0" rIns="0" bIns="0" rtlCol="0" anchor="ctr"/>
           <a:lstStyle/>
           <a:p>
-            <a:pPr indent="0" marL="0">
+            <a:pPr marL="0" indent="0">
               <a:buNone/>
             </a:pPr>
             <a:r>
@@ -9093,7 +9267,7 @@
           <a:bodyPr wrap="square" lIns="152400" tIns="152400" rIns="152400" bIns="152400" rtlCol="0" anchor="t"/>
           <a:lstStyle/>
           <a:p>
-            <a:pPr indent="0" marL="0">
+            <a:pPr marL="0" indent="0">
               <a:lnSpc>
                 <a:spcPts val="2000"/>
               </a:lnSpc>
@@ -9113,7 +9287,7 @@
             <a:endParaRPr lang="en-US" sz="1350" dirty="0"/>
           </a:p>
           <a:p>
-            <a:pPr indent="0" marL="0">
+            <a:pPr marL="0" indent="0">
               <a:lnSpc>
                 <a:spcPts val="2000"/>
               </a:lnSpc>
@@ -9133,7 +9307,7 @@
             <a:endParaRPr lang="en-US" sz="1350" dirty="0"/>
           </a:p>
           <a:p>
-            <a:pPr indent="0" marL="0">
+            <a:pPr marL="0" indent="0">
               <a:lnSpc>
                 <a:spcPts val="2000"/>
               </a:lnSpc>
@@ -9142,7 +9316,7 @@
             <a:endParaRPr lang="en-US" sz="1350" dirty="0"/>
           </a:p>
           <a:p>
-            <a:pPr indent="0" marL="0">
+            <a:pPr marL="0" indent="0">
               <a:lnSpc>
                 <a:spcPts val="2000"/>
               </a:lnSpc>
@@ -9182,6 +9356,13 @@
           </a:solidFill>
           <a:ln/>
         </p:spPr>
+        <p:txBody>
+          <a:bodyPr/>
+          <a:lstStyle/>
+          <a:p>
+            <a:endParaRPr lang="en-IN"/>
+          </a:p>
+        </p:txBody>
       </p:sp>
       <p:sp>
         <p:nvSpPr>
@@ -9204,7 +9385,7 @@
           <a:bodyPr wrap="square" lIns="0" tIns="0" rIns="0" bIns="0" rtlCol="0" anchor="ctr"/>
           <a:lstStyle/>
           <a:p>
-            <a:pPr algn="ctr" indent="0" marL="0">
+            <a:pPr marL="0" indent="0" algn="ctr">
               <a:buNone/>
             </a:pPr>
             <a:r>
@@ -9243,7 +9424,7 @@
           <a:bodyPr wrap="square" lIns="0" tIns="0" rIns="0" bIns="0" rtlCol="0" anchor="ctr"/>
           <a:lstStyle/>
           <a:p>
-            <a:pPr indent="0" marL="0">
+            <a:pPr marL="0" indent="0">
               <a:buNone/>
             </a:pPr>
             <a:r>
@@ -9282,7 +9463,7 @@
           <a:bodyPr wrap="square" lIns="0" tIns="0" rIns="0" bIns="0" rtlCol="0" anchor="t"/>
           <a:lstStyle/>
           <a:p>
-            <a:pPr indent="0" marL="0">
+            <a:pPr marL="0" indent="0">
               <a:lnSpc>
                 <a:spcPts val="1700"/>
               </a:lnSpc>
@@ -9322,6 +9503,13 @@
           </a:solidFill>
           <a:ln/>
         </p:spPr>
+        <p:txBody>
+          <a:bodyPr/>
+          <a:lstStyle/>
+          <a:p>
+            <a:endParaRPr lang="en-IN"/>
+          </a:p>
+        </p:txBody>
       </p:sp>
       <p:sp>
         <p:nvSpPr>
@@ -9344,7 +9532,7 @@
           <a:bodyPr wrap="square" lIns="0" tIns="0" rIns="0" bIns="0" rtlCol="0" anchor="ctr"/>
           <a:lstStyle/>
           <a:p>
-            <a:pPr algn="ctr" indent="0" marL="0">
+            <a:pPr marL="0" indent="0" algn="ctr">
               <a:buNone/>
             </a:pPr>
             <a:r>
@@ -9383,7 +9571,7 @@
           <a:bodyPr wrap="square" lIns="0" tIns="0" rIns="0" bIns="0" rtlCol="0" anchor="ctr"/>
           <a:lstStyle/>
           <a:p>
-            <a:pPr indent="0" marL="0">
+            <a:pPr marL="0" indent="0">
               <a:buNone/>
             </a:pPr>
             <a:r>
@@ -9422,7 +9610,7 @@
           <a:bodyPr wrap="square" lIns="0" tIns="0" rIns="0" bIns="0" rtlCol="0" anchor="t"/>
           <a:lstStyle/>
           <a:p>
-            <a:pPr indent="0" marL="0">
+            <a:pPr marL="0" indent="0">
               <a:lnSpc>
                 <a:spcPts val="1700"/>
               </a:lnSpc>
@@ -9462,6 +9650,13 @@
           </a:solidFill>
           <a:ln/>
         </p:spPr>
+        <p:txBody>
+          <a:bodyPr/>
+          <a:lstStyle/>
+          <a:p>
+            <a:endParaRPr lang="en-IN"/>
+          </a:p>
+        </p:txBody>
       </p:sp>
       <p:sp>
         <p:nvSpPr>
@@ -9484,7 +9679,7 @@
           <a:bodyPr wrap="square" lIns="0" tIns="0" rIns="0" bIns="0" rtlCol="0" anchor="ctr"/>
           <a:lstStyle/>
           <a:p>
-            <a:pPr algn="ctr" indent="0" marL="0">
+            <a:pPr marL="0" indent="0" algn="ctr">
               <a:buNone/>
             </a:pPr>
             <a:r>
@@ -9523,7 +9718,7 @@
           <a:bodyPr wrap="square" lIns="0" tIns="0" rIns="0" bIns="0" rtlCol="0" anchor="ctr"/>
           <a:lstStyle/>
           <a:p>
-            <a:pPr indent="0" marL="0">
+            <a:pPr marL="0" indent="0">
               <a:buNone/>
             </a:pPr>
             <a:r>
@@ -9562,7 +9757,7 @@
           <a:bodyPr wrap="square" lIns="0" tIns="0" rIns="0" bIns="0" rtlCol="0" anchor="t"/>
           <a:lstStyle/>
           <a:p>
-            <a:pPr indent="0" marL="0">
+            <a:pPr marL="0" indent="0">
               <a:lnSpc>
                 <a:spcPts val="1700"/>
               </a:lnSpc>
@@ -9602,6 +9797,13 @@
           </a:solidFill>
           <a:ln/>
         </p:spPr>
+        <p:txBody>
+          <a:bodyPr/>
+          <a:lstStyle/>
+          <a:p>
+            <a:endParaRPr lang="en-IN"/>
+          </a:p>
+        </p:txBody>
       </p:sp>
       <p:sp>
         <p:nvSpPr>
@@ -9624,7 +9826,7 @@
           <a:bodyPr wrap="square" lIns="0" tIns="0" rIns="0" bIns="0" rtlCol="0" anchor="ctr"/>
           <a:lstStyle/>
           <a:p>
-            <a:pPr algn="ctr" indent="0" marL="0">
+            <a:pPr marL="0" indent="0" algn="ctr">
               <a:buNone/>
             </a:pPr>
             <a:r>
@@ -9663,7 +9865,7 @@
           <a:bodyPr wrap="square" lIns="0" tIns="0" rIns="0" bIns="0" rtlCol="0" anchor="ctr"/>
           <a:lstStyle/>
           <a:p>
-            <a:pPr indent="0" marL="0">
+            <a:pPr marL="0" indent="0">
               <a:buNone/>
             </a:pPr>
             <a:r>
@@ -9702,7 +9904,7 @@
           <a:bodyPr wrap="square" lIns="0" tIns="0" rIns="0" bIns="0" rtlCol="0" anchor="t"/>
           <a:lstStyle/>
           <a:p>
-            <a:pPr indent="0" marL="0">
+            <a:pPr marL="0" indent="0">
               <a:lnSpc>
                 <a:spcPts val="1700"/>
               </a:lnSpc>
@@ -9739,6 +9941,7 @@
         <a:solidFill>
           <a:srgbClr val="FFFFFF"/>
         </a:solidFill>
+        <a:effectLst/>
       </p:bgPr>
     </p:bg>
     <p:spTree>
@@ -9776,11 +9979,11 @@
           <a:bodyPr wrap="square" lIns="0" tIns="0" rIns="0" bIns="0" rtlCol="0" anchor="ctr"/>
           <a:lstStyle/>
           <a:p>
-            <a:pPr indent="0" marL="0">
-              <a:buNone/>
-            </a:pPr>
-            <a:r>
-              <a:rPr lang="en-US" sz="1100" b="1" spc="200" kern="0" dirty="0">
+            <a:pPr marL="0" indent="0">
+              <a:buNone/>
+            </a:pPr>
+            <a:r>
+              <a:rPr lang="en-US" sz="1100" b="1" kern="0" spc="200" dirty="0">
                 <a:solidFill>
                   <a:srgbClr val="6B46C1"/>
                 </a:solidFill>
@@ -9815,7 +10018,7 @@
           <a:bodyPr wrap="square" lIns="0" tIns="0" rIns="0" bIns="0" rtlCol="0" anchor="ctr"/>
           <a:lstStyle/>
           <a:p>
-            <a:pPr indent="0" marL="0">
+            <a:pPr marL="0" indent="0">
               <a:buNone/>
             </a:pPr>
             <a:r>
@@ -9859,13 +10062,20 @@
             <a:prstDash val="solid"/>
           </a:ln>
           <a:effectLst>
-            <a:outerShdw sx="100000" sy="100000" kx="0" ky="0" algn="bl" rotWithShape="0" blurRad="101600" dist="25400" dir="5400000">
+            <a:outerShdw blurRad="101600" dist="25400" dir="5400000" algn="bl" rotWithShape="0">
               <a:srgbClr val="B9B2CE">
                 <a:alpha val="35000"/>
               </a:srgbClr>
             </a:outerShdw>
           </a:effectLst>
         </p:spPr>
+        <p:txBody>
+          <a:bodyPr/>
+          <a:lstStyle/>
+          <a:p>
+            <a:endParaRPr lang="en-IN"/>
+          </a:p>
+        </p:txBody>
       </p:sp>
       <p:sp>
         <p:nvSpPr>
@@ -9888,7 +10098,7 @@
           <a:bodyPr wrap="square" lIns="0" tIns="0" rIns="0" bIns="0" rtlCol="0" anchor="ctr"/>
           <a:lstStyle/>
           <a:p>
-            <a:pPr indent="0" marL="0">
+            <a:pPr marL="0" indent="0">
               <a:buNone/>
             </a:pPr>
             <a:r>
@@ -9927,7 +10137,7 @@
           <a:bodyPr wrap="square" lIns="0" tIns="0" rIns="0" bIns="0" rtlCol="0" anchor="t"/>
           <a:lstStyle/>
           <a:p>
-            <a:pPr indent="0" marL="0">
+            <a:pPr marL="0" indent="0">
               <a:lnSpc>
                 <a:spcPts val="1900"/>
               </a:lnSpc>
@@ -9969,7 +10179,7 @@
           <a:bodyPr wrap="square" lIns="0" tIns="0" rIns="0" bIns="0" rtlCol="0" anchor="ctr"/>
           <a:lstStyle/>
           <a:p>
-            <a:pPr indent="0" marL="0">
+            <a:pPr marL="0" indent="0">
               <a:buNone/>
             </a:pPr>
             <a:r>
@@ -10008,7 +10218,7 @@
           <a:bodyPr wrap="square" lIns="0" tIns="0" rIns="0" bIns="0" rtlCol="0" anchor="t"/>
           <a:lstStyle/>
           <a:p>
-            <a:pPr indent="0" marL="0">
+            <a:pPr marL="0" indent="0">
               <a:lnSpc>
                 <a:spcPts val="1900"/>
               </a:lnSpc>
@@ -10048,6 +10258,13 @@
           </a:solidFill>
           <a:ln/>
         </p:spPr>
+        <p:txBody>
+          <a:bodyPr/>
+          <a:lstStyle/>
+          <a:p>
+            <a:endParaRPr lang="en-IN"/>
+          </a:p>
+        </p:txBody>
       </p:sp>
       <p:sp>
         <p:nvSpPr>
@@ -10070,7 +10287,7 @@
           <a:bodyPr wrap="square" lIns="0" tIns="0" rIns="0" bIns="0" rtlCol="0" anchor="ctr"/>
           <a:lstStyle/>
           <a:p>
-            <a:pPr algn="ctr" indent="0" marL="0">
+            <a:pPr marL="0" indent="0" algn="ctr">
               <a:buNone/>
             </a:pPr>
             <a:r>
@@ -10109,7 +10326,7 @@
           <a:bodyPr wrap="square" lIns="0" tIns="0" rIns="0" bIns="0" rtlCol="0" anchor="ctr"/>
           <a:lstStyle/>
           <a:p>
-            <a:pPr indent="0" marL="0">
+            <a:pPr marL="0" indent="0">
               <a:buNone/>
             </a:pPr>
             <a:r>
@@ -10148,7 +10365,7 @@
           <a:bodyPr wrap="square" lIns="0" tIns="0" rIns="0" bIns="0" rtlCol="0" anchor="t"/>
           <a:lstStyle/>
           <a:p>
-            <a:pPr indent="0" marL="0">
+            <a:pPr marL="0" indent="0">
               <a:lnSpc>
                 <a:spcPts val="1700"/>
               </a:lnSpc>
@@ -10188,6 +10405,13 @@
           </a:solidFill>
           <a:ln/>
         </p:spPr>
+        <p:txBody>
+          <a:bodyPr/>
+          <a:lstStyle/>
+          <a:p>
+            <a:endParaRPr lang="en-IN"/>
+          </a:p>
+        </p:txBody>
       </p:sp>
       <p:sp>
         <p:nvSpPr>
@@ -10210,7 +10434,7 @@
           <a:bodyPr wrap="square" lIns="0" tIns="0" rIns="0" bIns="0" rtlCol="0" anchor="ctr"/>
           <a:lstStyle/>
           <a:p>
-            <a:pPr algn="ctr" indent="0" marL="0">
+            <a:pPr marL="0" indent="0" algn="ctr">
               <a:buNone/>
             </a:pPr>
             <a:r>
@@ -10249,7 +10473,7 @@
           <a:bodyPr wrap="square" lIns="0" tIns="0" rIns="0" bIns="0" rtlCol="0" anchor="ctr"/>
           <a:lstStyle/>
           <a:p>
-            <a:pPr indent="0" marL="0">
+            <a:pPr marL="0" indent="0">
               <a:buNone/>
             </a:pPr>
             <a:r>
@@ -10288,7 +10512,7 @@
           <a:bodyPr wrap="square" lIns="0" tIns="0" rIns="0" bIns="0" rtlCol="0" anchor="t"/>
           <a:lstStyle/>
           <a:p>
-            <a:pPr indent="0" marL="0">
+            <a:pPr marL="0" indent="0">
               <a:lnSpc>
                 <a:spcPts val="1700"/>
               </a:lnSpc>
@@ -10328,6 +10552,13 @@
           </a:solidFill>
           <a:ln/>
         </p:spPr>
+        <p:txBody>
+          <a:bodyPr/>
+          <a:lstStyle/>
+          <a:p>
+            <a:endParaRPr lang="en-IN"/>
+          </a:p>
+        </p:txBody>
       </p:sp>
       <p:sp>
         <p:nvSpPr>
@@ -10350,7 +10581,7 @@
           <a:bodyPr wrap="square" lIns="0" tIns="0" rIns="0" bIns="0" rtlCol="0" anchor="ctr"/>
           <a:lstStyle/>
           <a:p>
-            <a:pPr algn="ctr" indent="0" marL="0">
+            <a:pPr marL="0" indent="0" algn="ctr">
               <a:buNone/>
             </a:pPr>
             <a:r>
@@ -10389,7 +10620,7 @@
           <a:bodyPr wrap="square" lIns="0" tIns="0" rIns="0" bIns="0" rtlCol="0" anchor="ctr"/>
           <a:lstStyle/>
           <a:p>
-            <a:pPr indent="0" marL="0">
+            <a:pPr marL="0" indent="0">
               <a:buNone/>
             </a:pPr>
             <a:r>
@@ -10428,7 +10659,7 @@
           <a:bodyPr wrap="square" lIns="0" tIns="0" rIns="0" bIns="0" rtlCol="0" anchor="t"/>
           <a:lstStyle/>
           <a:p>
-            <a:pPr indent="0" marL="0">
+            <a:pPr marL="0" indent="0">
               <a:lnSpc>
                 <a:spcPts val="1700"/>
               </a:lnSpc>
@@ -10468,6 +10699,13 @@
           </a:solidFill>
           <a:ln/>
         </p:spPr>
+        <p:txBody>
+          <a:bodyPr/>
+          <a:lstStyle/>
+          <a:p>
+            <a:endParaRPr lang="en-IN"/>
+          </a:p>
+        </p:txBody>
       </p:sp>
       <p:sp>
         <p:nvSpPr>
@@ -10490,7 +10728,7 @@
           <a:bodyPr wrap="square" lIns="0" tIns="0" rIns="0" bIns="0" rtlCol="0" anchor="ctr"/>
           <a:lstStyle/>
           <a:p>
-            <a:pPr algn="ctr" indent="0" marL="0">
+            <a:pPr marL="0" indent="0" algn="ctr">
               <a:buNone/>
             </a:pPr>
             <a:r>
@@ -10529,7 +10767,7 @@
           <a:bodyPr wrap="square" lIns="0" tIns="0" rIns="0" bIns="0" rtlCol="0" anchor="ctr"/>
           <a:lstStyle/>
           <a:p>
-            <a:pPr indent="0" marL="0">
+            <a:pPr marL="0" indent="0">
               <a:buNone/>
             </a:pPr>
             <a:r>
@@ -10568,7 +10806,7 @@
           <a:bodyPr wrap="square" lIns="0" tIns="0" rIns="0" bIns="0" rtlCol="0" anchor="t"/>
           <a:lstStyle/>
           <a:p>
-            <a:pPr indent="0" marL="0">
+            <a:pPr marL="0" indent="0">
               <a:lnSpc>
                 <a:spcPts val="1700"/>
               </a:lnSpc>
@@ -10605,6 +10843,7 @@
         <a:solidFill>
           <a:srgbClr val="FFFFFF"/>
         </a:solidFill>
+        <a:effectLst/>
       </p:bgPr>
     </p:bg>
     <p:spTree>
@@ -10642,11 +10881,11 @@
           <a:bodyPr wrap="square" lIns="0" tIns="0" rIns="0" bIns="0" rtlCol="0" anchor="ctr"/>
           <a:lstStyle/>
           <a:p>
-            <a:pPr indent="0" marL="0">
-              <a:buNone/>
-            </a:pPr>
-            <a:r>
-              <a:rPr lang="en-US" sz="1100" b="1" spc="200" kern="0" dirty="0">
+            <a:pPr marL="0" indent="0">
+              <a:buNone/>
+            </a:pPr>
+            <a:r>
+              <a:rPr lang="en-US" sz="1100" b="1" kern="0" spc="200" dirty="0">
                 <a:solidFill>
                   <a:srgbClr val="6B46C1"/>
                 </a:solidFill>
@@ -10681,7 +10920,7 @@
           <a:bodyPr wrap="square" lIns="0" tIns="0" rIns="0" bIns="0" rtlCol="0" anchor="ctr"/>
           <a:lstStyle/>
           <a:p>
-            <a:pPr indent="0" marL="0">
+            <a:pPr marL="0" indent="0">
               <a:buNone/>
             </a:pPr>
             <a:r>
@@ -10701,14 +10940,14 @@
       </p:sp>
       <p:pic>
         <p:nvPicPr>
-          <p:cNvPr id="4" name="Image 0" descr="preencoded.png">    </p:cNvPr>
+          <p:cNvPr id="4" name="Image 0" descr="preencoded.png"/>
           <p:cNvPicPr>
             <a:picLocks noChangeAspect="1"/>
           </p:cNvPicPr>
           <p:nvPr/>
         </p:nvPicPr>
         <p:blipFill>
-          <a:blip r:embed="rId1"/>
+          <a:blip r:embed="rId3"/>
           <a:stretch>
             <a:fillRect/>
           </a:stretch>
@@ -10749,13 +10988,20 @@
             <a:prstDash val="solid"/>
           </a:ln>
           <a:effectLst>
-            <a:outerShdw sx="100000" sy="100000" kx="0" ky="0" algn="bl" rotWithShape="0" blurRad="101600" dist="25400" dir="5400000">
+            <a:outerShdw blurRad="101600" dist="25400" dir="5400000" algn="bl" rotWithShape="0">
               <a:srgbClr val="B9B2CE">
                 <a:alpha val="35000"/>
               </a:srgbClr>
             </a:outerShdw>
           </a:effectLst>
         </p:spPr>
+        <p:txBody>
+          <a:bodyPr/>
+          <a:lstStyle/>
+          <a:p>
+            <a:endParaRPr lang="en-IN"/>
+          </a:p>
+        </p:txBody>
       </p:sp>
       <p:sp>
         <p:nvSpPr>
@@ -10776,6 +11022,13 @@
           </a:solidFill>
           <a:ln/>
         </p:spPr>
+        <p:txBody>
+          <a:bodyPr/>
+          <a:lstStyle/>
+          <a:p>
+            <a:endParaRPr lang="en-IN"/>
+          </a:p>
+        </p:txBody>
       </p:sp>
       <p:sp>
         <p:nvSpPr>
@@ -10798,7 +11051,7 @@
           <a:bodyPr wrap="square" lIns="0" tIns="0" rIns="0" bIns="0" rtlCol="0" anchor="ctr"/>
           <a:lstStyle/>
           <a:p>
-            <a:pPr algn="ctr" indent="0" marL="0">
+            <a:pPr marL="0" indent="0" algn="ctr">
               <a:buNone/>
             </a:pPr>
             <a:r>
@@ -10837,7 +11090,7 @@
           <a:bodyPr wrap="square" lIns="0" tIns="0" rIns="0" bIns="0" rtlCol="0" anchor="ctr"/>
           <a:lstStyle/>
           <a:p>
-            <a:pPr indent="0" marL="0">
+            <a:pPr marL="0" indent="0">
               <a:buNone/>
             </a:pPr>
             <a:r>
@@ -10876,7 +11129,7 @@
           <a:bodyPr wrap="square" lIns="0" tIns="0" rIns="0" bIns="0" rtlCol="0" anchor="t"/>
           <a:lstStyle/>
           <a:p>
-            <a:pPr indent="0" marL="0">
+            <a:pPr marL="0" indent="0">
               <a:lnSpc>
                 <a:spcPts val="1500"/>
               </a:lnSpc>
@@ -10923,13 +11176,20 @@
             <a:prstDash val="solid"/>
           </a:ln>
           <a:effectLst>
-            <a:outerShdw sx="100000" sy="100000" kx="0" ky="0" algn="bl" rotWithShape="0" blurRad="101600" dist="25400" dir="5400000">
+            <a:outerShdw blurRad="101600" dist="25400" dir="5400000" algn="bl" rotWithShape="0">
               <a:srgbClr val="B9B2CE">
                 <a:alpha val="35000"/>
               </a:srgbClr>
             </a:outerShdw>
           </a:effectLst>
         </p:spPr>
+        <p:txBody>
+          <a:bodyPr/>
+          <a:lstStyle/>
+          <a:p>
+            <a:endParaRPr lang="en-IN"/>
+          </a:p>
+        </p:txBody>
       </p:sp>
       <p:sp>
         <p:nvSpPr>
@@ -10950,6 +11210,13 @@
           </a:solidFill>
           <a:ln/>
         </p:spPr>
+        <p:txBody>
+          <a:bodyPr/>
+          <a:lstStyle/>
+          <a:p>
+            <a:endParaRPr lang="en-IN"/>
+          </a:p>
+        </p:txBody>
       </p:sp>
       <p:sp>
         <p:nvSpPr>
@@ -10972,7 +11239,7 @@
           <a:bodyPr wrap="square" lIns="0" tIns="0" rIns="0" bIns="0" rtlCol="0" anchor="ctr"/>
           <a:lstStyle/>
           <a:p>
-            <a:pPr algn="ctr" indent="0" marL="0">
+            <a:pPr marL="0" indent="0" algn="ctr">
               <a:buNone/>
             </a:pPr>
             <a:r>
@@ -11011,7 +11278,7 @@
           <a:bodyPr wrap="square" lIns="0" tIns="0" rIns="0" bIns="0" rtlCol="0" anchor="ctr"/>
           <a:lstStyle/>
           <a:p>
-            <a:pPr indent="0" marL="0">
+            <a:pPr marL="0" indent="0">
               <a:buNone/>
             </a:pPr>
             <a:r>
@@ -11050,7 +11317,7 @@
           <a:bodyPr wrap="square" lIns="0" tIns="0" rIns="0" bIns="0" rtlCol="0" anchor="t"/>
           <a:lstStyle/>
           <a:p>
-            <a:pPr indent="0" marL="0">
+            <a:pPr marL="0" indent="0">
               <a:lnSpc>
                 <a:spcPts val="1500"/>
               </a:lnSpc>
@@ -11097,13 +11364,20 @@
             <a:prstDash val="solid"/>
           </a:ln>
           <a:effectLst>
-            <a:outerShdw sx="100000" sy="100000" kx="0" ky="0" algn="bl" rotWithShape="0" blurRad="101600" dist="25400" dir="5400000">
+            <a:outerShdw blurRad="101600" dist="25400" dir="5400000" algn="bl" rotWithShape="0">
               <a:srgbClr val="B9B2CE">
                 <a:alpha val="35000"/>
               </a:srgbClr>
             </a:outerShdw>
           </a:effectLst>
         </p:spPr>
+        <p:txBody>
+          <a:bodyPr/>
+          <a:lstStyle/>
+          <a:p>
+            <a:endParaRPr lang="en-IN"/>
+          </a:p>
+        </p:txBody>
       </p:sp>
       <p:sp>
         <p:nvSpPr>
@@ -11124,6 +11398,13 @@
           </a:solidFill>
           <a:ln/>
         </p:spPr>
+        <p:txBody>
+          <a:bodyPr/>
+          <a:lstStyle/>
+          <a:p>
+            <a:endParaRPr lang="en-IN"/>
+          </a:p>
+        </p:txBody>
       </p:sp>
       <p:sp>
         <p:nvSpPr>
@@ -11146,7 +11427,7 @@
           <a:bodyPr wrap="square" lIns="0" tIns="0" rIns="0" bIns="0" rtlCol="0" anchor="ctr"/>
           <a:lstStyle/>
           <a:p>
-            <a:pPr algn="ctr" indent="0" marL="0">
+            <a:pPr marL="0" indent="0" algn="ctr">
               <a:buNone/>
             </a:pPr>
             <a:r>
@@ -11185,7 +11466,7 @@
           <a:bodyPr wrap="square" lIns="0" tIns="0" rIns="0" bIns="0" rtlCol="0" anchor="ctr"/>
           <a:lstStyle/>
           <a:p>
-            <a:pPr indent="0" marL="0">
+            <a:pPr marL="0" indent="0">
               <a:buNone/>
             </a:pPr>
             <a:r>
@@ -11224,7 +11505,7 @@
           <a:bodyPr wrap="square" lIns="0" tIns="0" rIns="0" bIns="0" rtlCol="0" anchor="t"/>
           <a:lstStyle/>
           <a:p>
-            <a:pPr indent="0" marL="0">
+            <a:pPr marL="0" indent="0">
               <a:lnSpc>
                 <a:spcPts val="1500"/>
               </a:lnSpc>
@@ -11261,6 +11542,7 @@
         <a:solidFill>
           <a:srgbClr val="FFFFFF"/>
         </a:solidFill>
+        <a:effectLst/>
       </p:bgPr>
     </p:bg>
     <p:spTree>
@@ -11298,11 +11580,11 @@
           <a:bodyPr wrap="square" lIns="0" tIns="0" rIns="0" bIns="0" rtlCol="0" anchor="ctr"/>
           <a:lstStyle/>
           <a:p>
-            <a:pPr indent="0" marL="0">
-              <a:buNone/>
-            </a:pPr>
-            <a:r>
-              <a:rPr lang="en-US" sz="1100" b="1" spc="200" kern="0" dirty="0">
+            <a:pPr marL="0" indent="0">
+              <a:buNone/>
+            </a:pPr>
+            <a:r>
+              <a:rPr lang="en-US" sz="1100" b="1" kern="0" spc="200" dirty="0">
                 <a:solidFill>
                   <a:srgbClr val="6B46C1"/>
                 </a:solidFill>
@@ -11337,7 +11619,7 @@
           <a:bodyPr wrap="square" lIns="0" tIns="0" rIns="0" bIns="0" rtlCol="0" anchor="ctr"/>
           <a:lstStyle/>
           <a:p>
-            <a:pPr indent="0" marL="0">
+            <a:pPr marL="0" indent="0">
               <a:buNone/>
             </a:pPr>
             <a:r>
@@ -11381,13 +11663,20 @@
             <a:prstDash val="solid"/>
           </a:ln>
           <a:effectLst>
-            <a:outerShdw sx="100000" sy="100000" kx="0" ky="0" algn="bl" rotWithShape="0" blurRad="101600" dist="25400" dir="5400000">
+            <a:outerShdw blurRad="101600" dist="25400" dir="5400000" algn="bl" rotWithShape="0">
               <a:srgbClr val="B9B2CE">
                 <a:alpha val="35000"/>
               </a:srgbClr>
             </a:outerShdw>
           </a:effectLst>
         </p:spPr>
+        <p:txBody>
+          <a:bodyPr/>
+          <a:lstStyle/>
+          <a:p>
+            <a:endParaRPr lang="en-IN"/>
+          </a:p>
+        </p:txBody>
       </p:sp>
       <p:sp>
         <p:nvSpPr>
@@ -11410,7 +11699,7 @@
           <a:bodyPr wrap="square" lIns="0" tIns="0" rIns="0" bIns="0" rtlCol="0" anchor="ctr"/>
           <a:lstStyle/>
           <a:p>
-            <a:pPr indent="0" marL="0">
+            <a:pPr marL="0" indent="0">
               <a:buNone/>
             </a:pPr>
             <a:r>
@@ -11449,7 +11738,7 @@
           <a:bodyPr wrap="square" lIns="0" tIns="0" rIns="0" bIns="0" rtlCol="0" anchor="ctr"/>
           <a:lstStyle/>
           <a:p>
-            <a:pPr indent="0" marL="0">
+            <a:pPr marL="0" indent="0">
               <a:buNone/>
             </a:pPr>
             <a:r>
@@ -11493,13 +11782,20 @@
             <a:prstDash val="solid"/>
           </a:ln>
           <a:effectLst>
-            <a:outerShdw sx="100000" sy="100000" kx="0" ky="0" algn="bl" rotWithShape="0" blurRad="101600" dist="25400" dir="5400000">
+            <a:outerShdw blurRad="101600" dist="25400" dir="5400000" algn="bl" rotWithShape="0">
               <a:srgbClr val="B9B2CE">
                 <a:alpha val="35000"/>
               </a:srgbClr>
             </a:outerShdw>
           </a:effectLst>
         </p:spPr>
+        <p:txBody>
+          <a:bodyPr/>
+          <a:lstStyle/>
+          <a:p>
+            <a:endParaRPr lang="en-IN"/>
+          </a:p>
+        </p:txBody>
       </p:sp>
       <p:sp>
         <p:nvSpPr>
@@ -11522,7 +11818,7 @@
           <a:bodyPr wrap="square" lIns="0" tIns="0" rIns="0" bIns="0" rtlCol="0" anchor="ctr"/>
           <a:lstStyle/>
           <a:p>
-            <a:pPr indent="0" marL="0">
+            <a:pPr marL="0" indent="0">
               <a:buNone/>
             </a:pPr>
             <a:r>
@@ -11561,7 +11857,7 @@
           <a:bodyPr wrap="square" lIns="0" tIns="0" rIns="0" bIns="0" rtlCol="0" anchor="ctr"/>
           <a:lstStyle/>
           <a:p>
-            <a:pPr indent="0" marL="0">
+            <a:pPr marL="0" indent="0">
               <a:buNone/>
             </a:pPr>
             <a:r>
@@ -11605,13 +11901,20 @@
             <a:prstDash val="solid"/>
           </a:ln>
           <a:effectLst>
-            <a:outerShdw sx="100000" sy="100000" kx="0" ky="0" algn="bl" rotWithShape="0" blurRad="101600" dist="25400" dir="5400000">
+            <a:outerShdw blurRad="101600" dist="25400" dir="5400000" algn="bl" rotWithShape="0">
               <a:srgbClr val="B9B2CE">
                 <a:alpha val="35000"/>
               </a:srgbClr>
             </a:outerShdw>
           </a:effectLst>
         </p:spPr>
+        <p:txBody>
+          <a:bodyPr/>
+          <a:lstStyle/>
+          <a:p>
+            <a:endParaRPr lang="en-IN"/>
+          </a:p>
+        </p:txBody>
       </p:sp>
       <p:sp>
         <p:nvSpPr>
@@ -11634,7 +11937,7 @@
           <a:bodyPr wrap="square" lIns="0" tIns="0" rIns="0" bIns="0" rtlCol="0" anchor="ctr"/>
           <a:lstStyle/>
           <a:p>
-            <a:pPr indent="0" marL="0">
+            <a:pPr marL="0" indent="0">
               <a:buNone/>
             </a:pPr>
             <a:r>
@@ -11673,7 +11976,7 @@
           <a:bodyPr wrap="square" lIns="0" tIns="0" rIns="0" bIns="0" rtlCol="0" anchor="ctr"/>
           <a:lstStyle/>
           <a:p>
-            <a:pPr indent="0" marL="0">
+            <a:pPr marL="0" indent="0">
               <a:buNone/>
             </a:pPr>
             <a:r>
@@ -11717,13 +12020,20 @@
             <a:prstDash val="solid"/>
           </a:ln>
           <a:effectLst>
-            <a:outerShdw sx="100000" sy="100000" kx="0" ky="0" algn="bl" rotWithShape="0" blurRad="101600" dist="25400" dir="5400000">
+            <a:outerShdw blurRad="101600" dist="25400" dir="5400000" algn="bl" rotWithShape="0">
               <a:srgbClr val="B9B2CE">
                 <a:alpha val="35000"/>
               </a:srgbClr>
             </a:outerShdw>
           </a:effectLst>
         </p:spPr>
+        <p:txBody>
+          <a:bodyPr/>
+          <a:lstStyle/>
+          <a:p>
+            <a:endParaRPr lang="en-IN"/>
+          </a:p>
+        </p:txBody>
       </p:sp>
       <p:sp>
         <p:nvSpPr>
@@ -11746,7 +12056,7 @@
           <a:bodyPr wrap="square" lIns="0" tIns="0" rIns="0" bIns="0" rtlCol="0" anchor="ctr"/>
           <a:lstStyle/>
           <a:p>
-            <a:pPr indent="0" marL="0">
+            <a:pPr marL="0" indent="0">
               <a:buNone/>
             </a:pPr>
             <a:r>
@@ -11785,7 +12095,7 @@
           <a:bodyPr wrap="square" lIns="0" tIns="0" rIns="0" bIns="0" rtlCol="0" anchor="ctr"/>
           <a:lstStyle/>
           <a:p>
-            <a:pPr indent="0" marL="0">
+            <a:pPr marL="0" indent="0">
               <a:buNone/>
             </a:pPr>
             <a:r>
@@ -11829,13 +12139,20 @@
             <a:prstDash val="solid"/>
           </a:ln>
           <a:effectLst>
-            <a:outerShdw sx="100000" sy="100000" kx="0" ky="0" algn="bl" rotWithShape="0" blurRad="101600" dist="25400" dir="5400000">
+            <a:outerShdw blurRad="101600" dist="25400" dir="5400000" algn="bl" rotWithShape="0">
               <a:srgbClr val="B9B2CE">
                 <a:alpha val="35000"/>
               </a:srgbClr>
             </a:outerShdw>
           </a:effectLst>
         </p:spPr>
+        <p:txBody>
+          <a:bodyPr/>
+          <a:lstStyle/>
+          <a:p>
+            <a:endParaRPr lang="en-IN"/>
+          </a:p>
+        </p:txBody>
       </p:sp>
       <p:sp>
         <p:nvSpPr>
@@ -11858,7 +12175,7 @@
           <a:bodyPr wrap="square" lIns="0" tIns="0" rIns="0" bIns="0" rtlCol="0" anchor="ctr"/>
           <a:lstStyle/>
           <a:p>
-            <a:pPr indent="0" marL="0">
+            <a:pPr marL="0" indent="0">
               <a:buNone/>
             </a:pPr>
             <a:r>
@@ -11897,7 +12214,7 @@
           <a:bodyPr wrap="square" lIns="0" tIns="0" rIns="0" bIns="0" rtlCol="0" anchor="ctr"/>
           <a:lstStyle/>
           <a:p>
-            <a:pPr indent="0" marL="0">
+            <a:pPr marL="0" indent="0">
               <a:buNone/>
             </a:pPr>
             <a:r>
@@ -11941,13 +12258,20 @@
             <a:prstDash val="solid"/>
           </a:ln>
           <a:effectLst>
-            <a:outerShdw sx="100000" sy="100000" kx="0" ky="0" algn="bl" rotWithShape="0" blurRad="101600" dist="25400" dir="5400000">
+            <a:outerShdw blurRad="101600" dist="25400" dir="5400000" algn="bl" rotWithShape="0">
               <a:srgbClr val="B9B2CE">
                 <a:alpha val="35000"/>
               </a:srgbClr>
             </a:outerShdw>
           </a:effectLst>
         </p:spPr>
+        <p:txBody>
+          <a:bodyPr/>
+          <a:lstStyle/>
+          <a:p>
+            <a:endParaRPr lang="en-IN"/>
+          </a:p>
+        </p:txBody>
       </p:sp>
       <p:sp>
         <p:nvSpPr>
@@ -11970,7 +12294,7 @@
           <a:bodyPr wrap="square" lIns="0" tIns="0" rIns="0" bIns="0" rtlCol="0" anchor="ctr"/>
           <a:lstStyle/>
           <a:p>
-            <a:pPr indent="0" marL="0">
+            <a:pPr marL="0" indent="0">
               <a:buNone/>
             </a:pPr>
             <a:r>
@@ -12009,7 +12333,7 @@
           <a:bodyPr wrap="square" lIns="0" tIns="0" rIns="0" bIns="0" rtlCol="0" anchor="ctr"/>
           <a:lstStyle/>
           <a:p>
-            <a:pPr indent="0" marL="0">
+            <a:pPr marL="0" indent="0">
               <a:buNone/>
             </a:pPr>
             <a:r>
@@ -12328,4 +12652,319 @@
     </a:ext>
   </a:extLst>
 </a:theme>
+</file>
+
+<file path=ppt/theme/theme2.xml><?xml version="1.0" encoding="utf-8"?>
+<a:theme xmlns:a="http://schemas.openxmlformats.org/drawingml/2006/main" name="Office Theme">
+  <a:themeElements>
+    <a:clrScheme name="Office">
+      <a:dk1>
+        <a:sysClr val="windowText" lastClr="000000"/>
+      </a:dk1>
+      <a:lt1>
+        <a:sysClr val="window" lastClr="FFFFFF"/>
+      </a:lt1>
+      <a:dk2>
+        <a:srgbClr val="0E2841"/>
+      </a:dk2>
+      <a:lt2>
+        <a:srgbClr val="E8E8E8"/>
+      </a:lt2>
+      <a:accent1>
+        <a:srgbClr val="156082"/>
+      </a:accent1>
+      <a:accent2>
+        <a:srgbClr val="E97132"/>
+      </a:accent2>
+      <a:accent3>
+        <a:srgbClr val="196B24"/>
+      </a:accent3>
+      <a:accent4>
+        <a:srgbClr val="0F9ED5"/>
+      </a:accent4>
+      <a:accent5>
+        <a:srgbClr val="A02B93"/>
+      </a:accent5>
+      <a:accent6>
+        <a:srgbClr val="4EA72E"/>
+      </a:accent6>
+      <a:hlink>
+        <a:srgbClr val="467886"/>
+      </a:hlink>
+      <a:folHlink>
+        <a:srgbClr val="96607D"/>
+      </a:folHlink>
+    </a:clrScheme>
+    <a:fontScheme name="Office">
+      <a:majorFont>
+        <a:latin typeface="Aptos Display" panose="02110004020202020204"/>
+        <a:ea typeface=""/>
+        <a:cs typeface=""/>
+        <a:font script="Jpan" typeface="游ゴシック Light"/>
+        <a:font script="Hang" typeface="맑은 고딕"/>
+        <a:font script="Hans" typeface="等线 Light"/>
+        <a:font script="Hant" typeface="新細明體"/>
+        <a:font script="Arab" typeface="Times New Roman"/>
+        <a:font script="Hebr" typeface="Times New Roman"/>
+        <a:font script="Thai" typeface="Angsana New"/>
+        <a:font script="Ethi" typeface="Nyala"/>
+        <a:font script="Beng" typeface="Vrinda"/>
+        <a:font script="Gujr" typeface="Shruti"/>
+        <a:font script="Khmr" typeface="MoolBoran"/>
+        <a:font script="Knda" typeface="Tunga"/>
+        <a:font script="Guru" typeface="Raavi"/>
+        <a:font script="Cans" typeface="Euphemia"/>
+        <a:font script="Cher" typeface="Plantagenet Cherokee"/>
+        <a:font script="Yiii" typeface="Microsoft Yi Baiti"/>
+        <a:font script="Tibt" typeface="Microsoft Himalaya"/>
+        <a:font script="Thaa" typeface="MV Boli"/>
+        <a:font script="Deva" typeface="Mangal"/>
+        <a:font script="Telu" typeface="Gautami"/>
+        <a:font script="Taml" typeface="Latha"/>
+        <a:font script="Syrc" typeface="Estrangelo Edessa"/>
+        <a:font script="Orya" typeface="Kalinga"/>
+        <a:font script="Mlym" typeface="Kartika"/>
+        <a:font script="Laoo" typeface="DokChampa"/>
+        <a:font script="Sinh" typeface="Iskoola Pota"/>
+        <a:font script="Mong" typeface="Mongolian Baiti"/>
+        <a:font script="Viet" typeface="Times New Roman"/>
+        <a:font script="Uigh" typeface="Microsoft Uighur"/>
+        <a:font script="Geor" typeface="Sylfaen"/>
+        <a:font script="Armn" typeface="Arial"/>
+        <a:font script="Bugi" typeface="Leelawadee UI"/>
+        <a:font script="Bopo" typeface="Microsoft JhengHei"/>
+        <a:font script="Java" typeface="Javanese Text"/>
+        <a:font script="Lisu" typeface="Segoe UI"/>
+        <a:font script="Mymr" typeface="Myanmar Text"/>
+        <a:font script="Nkoo" typeface="Ebrima"/>
+        <a:font script="Olck" typeface="Nirmala UI"/>
+        <a:font script="Osma" typeface="Ebrima"/>
+        <a:font script="Phag" typeface="Phagspa"/>
+        <a:font script="Syrn" typeface="Estrangelo Edessa"/>
+        <a:font script="Syrj" typeface="Estrangelo Edessa"/>
+        <a:font script="Syre" typeface="Estrangelo Edessa"/>
+        <a:font script="Sora" typeface="Nirmala UI"/>
+        <a:font script="Tale" typeface="Microsoft Tai Le"/>
+        <a:font script="Talu" typeface="Microsoft New Tai Lue"/>
+        <a:font script="Tfng" typeface="Ebrima"/>
+      </a:majorFont>
+      <a:minorFont>
+        <a:latin typeface="Aptos" panose="02110004020202020204"/>
+        <a:ea typeface=""/>
+        <a:cs typeface=""/>
+        <a:font script="Jpan" typeface="游ゴシック"/>
+        <a:font script="Hang" typeface="맑은 고딕"/>
+        <a:font script="Hans" typeface="等线"/>
+        <a:font script="Hant" typeface="新細明體"/>
+        <a:font script="Arab" typeface="Arial"/>
+        <a:font script="Hebr" typeface="Arial"/>
+        <a:font script="Thai" typeface="Cordia New"/>
+        <a:font script="Ethi" typeface="Nyala"/>
+        <a:font script="Beng" typeface="Vrinda"/>
+        <a:font script="Gujr" typeface="Shruti"/>
+        <a:font script="Khmr" typeface="DaunPenh"/>
+        <a:font script="Knda" typeface="Tunga"/>
+        <a:font script="Guru" typeface="Raavi"/>
+        <a:font script="Cans" typeface="Euphemia"/>
+        <a:font script="Cher" typeface="Plantagenet Cherokee"/>
+        <a:font script="Yiii" typeface="Microsoft Yi Baiti"/>
+        <a:font script="Tibt" typeface="Microsoft Himalaya"/>
+        <a:font script="Thaa" typeface="MV Boli"/>
+        <a:font script="Deva" typeface="Mangal"/>
+        <a:font script="Telu" typeface="Gautami"/>
+        <a:font script="Taml" typeface="Latha"/>
+        <a:font script="Syrc" typeface="Estrangelo Edessa"/>
+        <a:font script="Orya" typeface="Kalinga"/>
+        <a:font script="Mlym" typeface="Kartika"/>
+        <a:font script="Laoo" typeface="DokChampa"/>
+        <a:font script="Sinh" typeface="Iskoola Pota"/>
+        <a:font script="Mong" typeface="Mongolian Baiti"/>
+        <a:font script="Viet" typeface="Arial"/>
+        <a:font script="Uigh" typeface="Microsoft Uighur"/>
+        <a:font script="Geor" typeface="Sylfaen"/>
+        <a:font script="Armn" typeface="Arial"/>
+        <a:font script="Bugi" typeface="Leelawadee UI"/>
+        <a:font script="Bopo" typeface="Microsoft JhengHei"/>
+        <a:font script="Java" typeface="Javanese Text"/>
+        <a:font script="Lisu" typeface="Segoe UI"/>
+        <a:font script="Mymr" typeface="Myanmar Text"/>
+        <a:font script="Nkoo" typeface="Ebrima"/>
+        <a:font script="Olck" typeface="Nirmala UI"/>
+        <a:font script="Osma" typeface="Ebrima"/>
+        <a:font script="Phag" typeface="Phagspa"/>
+        <a:font script="Syrn" typeface="Estrangelo Edessa"/>
+        <a:font script="Syrj" typeface="Estrangelo Edessa"/>
+        <a:font script="Syre" typeface="Estrangelo Edessa"/>
+        <a:font script="Sora" typeface="Nirmala UI"/>
+        <a:font script="Tale" typeface="Microsoft Tai Le"/>
+        <a:font script="Talu" typeface="Microsoft New Tai Lue"/>
+        <a:font script="Tfng" typeface="Ebrima"/>
+      </a:minorFont>
+    </a:fontScheme>
+    <a:fmtScheme name="Office">
+      <a:fillStyleLst>
+        <a:solidFill>
+          <a:schemeClr val="phClr"/>
+        </a:solidFill>
+        <a:gradFill rotWithShape="1">
+          <a:gsLst>
+            <a:gs pos="0">
+              <a:schemeClr val="phClr">
+                <a:lumMod val="110000"/>
+                <a:satMod val="105000"/>
+                <a:tint val="67000"/>
+              </a:schemeClr>
+            </a:gs>
+            <a:gs pos="50000">
+              <a:schemeClr val="phClr">
+                <a:lumMod val="105000"/>
+                <a:satMod val="103000"/>
+                <a:tint val="73000"/>
+              </a:schemeClr>
+            </a:gs>
+            <a:gs pos="100000">
+              <a:schemeClr val="phClr">
+                <a:lumMod val="105000"/>
+                <a:satMod val="109000"/>
+                <a:tint val="81000"/>
+              </a:schemeClr>
+            </a:gs>
+          </a:gsLst>
+          <a:lin ang="5400000" scaled="0"/>
+        </a:gradFill>
+        <a:gradFill rotWithShape="1">
+          <a:gsLst>
+            <a:gs pos="0">
+              <a:schemeClr val="phClr">
+                <a:satMod val="103000"/>
+                <a:lumMod val="102000"/>
+                <a:tint val="94000"/>
+              </a:schemeClr>
+            </a:gs>
+            <a:gs pos="50000">
+              <a:schemeClr val="phClr">
+                <a:satMod val="110000"/>
+                <a:lumMod val="100000"/>
+                <a:shade val="100000"/>
+              </a:schemeClr>
+            </a:gs>
+            <a:gs pos="100000">
+              <a:schemeClr val="phClr">
+                <a:lumMod val="99000"/>
+                <a:satMod val="120000"/>
+                <a:shade val="78000"/>
+              </a:schemeClr>
+            </a:gs>
+          </a:gsLst>
+          <a:lin ang="5400000" scaled="0"/>
+        </a:gradFill>
+      </a:fillStyleLst>
+      <a:lnStyleLst>
+        <a:ln w="12700" cap="flat" cmpd="sng" algn="ctr">
+          <a:solidFill>
+            <a:schemeClr val="phClr"/>
+          </a:solidFill>
+          <a:prstDash val="solid"/>
+          <a:miter lim="800000"/>
+        </a:ln>
+        <a:ln w="19050" cap="flat" cmpd="sng" algn="ctr">
+          <a:solidFill>
+            <a:schemeClr val="phClr"/>
+          </a:solidFill>
+          <a:prstDash val="solid"/>
+          <a:miter lim="800000"/>
+        </a:ln>
+        <a:ln w="25400" cap="flat" cmpd="sng" algn="ctr">
+          <a:solidFill>
+            <a:schemeClr val="phClr"/>
+          </a:solidFill>
+          <a:prstDash val="solid"/>
+          <a:miter lim="800000"/>
+        </a:ln>
+      </a:lnStyleLst>
+      <a:effectStyleLst>
+        <a:effectStyle>
+          <a:effectLst/>
+        </a:effectStyle>
+        <a:effectStyle>
+          <a:effectLst/>
+        </a:effectStyle>
+        <a:effectStyle>
+          <a:effectLst>
+            <a:outerShdw blurRad="57150" dist="19050" dir="5400000" algn="ctr" rotWithShape="0">
+              <a:srgbClr val="000000">
+                <a:alpha val="63000"/>
+              </a:srgbClr>
+            </a:outerShdw>
+          </a:effectLst>
+        </a:effectStyle>
+      </a:effectStyleLst>
+      <a:bgFillStyleLst>
+        <a:solidFill>
+          <a:schemeClr val="phClr"/>
+        </a:solidFill>
+        <a:solidFill>
+          <a:schemeClr val="phClr">
+            <a:tint val="95000"/>
+            <a:satMod val="170000"/>
+          </a:schemeClr>
+        </a:solidFill>
+        <a:gradFill rotWithShape="1">
+          <a:gsLst>
+            <a:gs pos="0">
+              <a:schemeClr val="phClr">
+                <a:tint val="93000"/>
+                <a:satMod val="150000"/>
+                <a:shade val="98000"/>
+                <a:lumMod val="102000"/>
+              </a:schemeClr>
+            </a:gs>
+            <a:gs pos="50000">
+              <a:schemeClr val="phClr">
+                <a:tint val="98000"/>
+                <a:satMod val="130000"/>
+                <a:shade val="90000"/>
+                <a:lumMod val="103000"/>
+              </a:schemeClr>
+            </a:gs>
+            <a:gs pos="100000">
+              <a:schemeClr val="phClr">
+                <a:shade val="63000"/>
+                <a:satMod val="120000"/>
+              </a:schemeClr>
+            </a:gs>
+          </a:gsLst>
+          <a:lin ang="5400000" scaled="0"/>
+        </a:gradFill>
+      </a:bgFillStyleLst>
+    </a:fmtScheme>
+  </a:themeElements>
+  <a:objectDefaults>
+    <a:lnDef>
+      <a:spPr/>
+      <a:bodyPr/>
+      <a:lstStyle/>
+      <a:style>
+        <a:lnRef idx="2">
+          <a:schemeClr val="accent1"/>
+        </a:lnRef>
+        <a:fillRef idx="0">
+          <a:schemeClr val="accent1"/>
+        </a:fillRef>
+        <a:effectRef idx="1">
+          <a:schemeClr val="accent1"/>
+        </a:effectRef>
+        <a:fontRef idx="minor">
+          <a:schemeClr val="tx1"/>
+        </a:fontRef>
+      </a:style>
+    </a:lnDef>
+  </a:objectDefaults>
+  <a:extraClrSchemeLst/>
+  <a:extLst>
+    <a:ext uri="{05A4C25C-085E-4340-85A3-A5531E510DB2}">
+      <thm15:themeFamily xmlns:thm15="http://schemas.microsoft.com/office/thememl/2012/main" name="Office Theme" id="{2E142A2C-CD16-42D6-873A-C26D2A0506FA}" vid="{1BDDFF52-6CD6-40A5-AB3C-68EB2F1E4D0A}"/>
+    </a:ext>
+  </a:extLst>
+</a:theme>
 </file>